--- a/ForgeOS/Linux_System_Monitor_OSSP.pptx
+++ b/ForgeOS/Linux_System_Monitor_OSSP.pptx
@@ -4,6 +4,9 @@
   <p:sldMasterIdLst>
     <p:sldMasterId id="2147483648" r:id="rId1"/>
   </p:sldMasterIdLst>
+  <p:notesMasterIdLst>
+    <p:notesMasterId r:id="rId14"/>
+  </p:notesMasterIdLst>
   <p:sldIdLst>
     <p:sldId id="256" r:id="rId2"/>
     <p:sldId id="257" r:id="rId3"/>
@@ -18,10 +21,7 @@
     <p:sldId id="266" r:id="rId12"/>
     <p:sldId id="267" r:id="rId13"/>
   </p:sldIdLst>
-  <p:notesMasterIdLst>
-    <p:notesMasterId r:id="rId14"/>
-  </p:notesMasterIdLst>
-  <p:sldSz cx="9144000" cy="5143500"/>
+  <p:sldSz cx="9144000" cy="5143500" type="screen16x9"/>
   <p:notesSz cx="5143500" cy="9144000"/>
   <p:defaultTextStyle>
     <a:lvl1pPr marL="0" algn="l" defTabSz="914400" rtl="0" eaLnBrk="1" latinLnBrk="0" hangingPunct="1">
@@ -115,6 +115,11 @@
       </a:defRPr>
     </a:lvl9pPr>
   </p:defaultTextStyle>
+  <p:extLst>
+    <p:ext uri="{EFAFB233-063F-42B5-8137-9DF3F51BA10A}">
+      <p15:sldGuideLst xmlns:p15="http://schemas.microsoft.com/office/powerpoint/2012/main"/>
+    </p:ext>
+  </p:extLst>
 </p:presentation>
 </file>
 
@@ -140,234 +145,10 @@
           <a:chExt cx="0" cy="0"/>
         </a:xfrm>
       </p:grpSpPr>
-      <p:sp>
-        <p:nvSpPr>
-          <p:cNvPr id="2" name="Header Placeholder 1"/>
-          <p:cNvSpPr>
-            <a:spLocks noGrp="1"/>
-          </p:cNvSpPr>
-          <p:nvPr>
-            <p:ph type="hdr" sz="quarter"/>
-          </p:nvPr>
-        </p:nvSpPr>
-        <p:spPr>
-          <a:xfrm>
-            <a:off x="0" y="0"/>
-            <a:ext cx="2971800" cy="458788"/>
-          </a:xfrm>
-          <a:prstGeom prst="rect">
-            <a:avLst/>
-          </a:prstGeom>
-        </p:spPr>
-        <p:txBody>
-          <a:bodyPr vert="horz" lIns="91440" tIns="45720" rIns="91440" bIns="45720" rtlCol="0"/>
-          <a:lstStyle>
-            <a:lvl1pPr algn="l">
-              <a:defRPr sz="1200"/>
-            </a:lvl1pPr>
-          </a:lstStyle>
-          <a:p>
-            <a:endParaRPr lang="en-US"/>
-          </a:p>
-        </p:txBody>
-      </p:sp>
-      <p:sp>
-        <p:nvSpPr>
-          <p:cNvPr id="3" name="Date Placeholder 2"/>
-          <p:cNvSpPr>
-            <a:spLocks noGrp="1"/>
-          </p:cNvSpPr>
-          <p:nvPr>
-            <p:ph type="dt" idx="1"/>
-          </p:nvPr>
-        </p:nvSpPr>
-        <p:spPr>
-          <a:xfrm>
-            <a:off x="3884613" y="0"/>
-            <a:ext cx="2971800" cy="458788"/>
-          </a:xfrm>
-          <a:prstGeom prst="rect">
-            <a:avLst/>
-          </a:prstGeom>
-        </p:spPr>
-        <p:txBody>
-          <a:bodyPr vert="horz" lIns="91440" tIns="45720" rIns="91440" bIns="45720" rtlCol="0"/>
-          <a:lstStyle>
-            <a:lvl1pPr algn="r">
-              <a:defRPr sz="1200"/>
-            </a:lvl1pPr>
-          </a:lstStyle>
-          <a:p>
-            <a:fld id="{5282F153-3F37-0F45-9E97-73ACFA13230C}" type="datetimeFigureOut">
-              <a:rPr lang="en-US"/>
-              <a:t>7/23/19</a:t>
-            </a:fld>
-            <a:endParaRPr lang="en-US"/>
-          </a:p>
-        </p:txBody>
-      </p:sp>
-      <p:sp>
-        <p:nvSpPr>
-          <p:cNvPr id="4" name="Slide Image Placeholder 3"/>
-          <p:cNvSpPr>
-            <a:spLocks noGrp="1" noRot="1" noChangeAspect="1"/>
-          </p:cNvSpPr>
-          <p:nvPr>
-            <p:ph type="sldImg" idx="2"/>
-          </p:nvPr>
-        </p:nvSpPr>
-        <p:spPr>
-          <a:xfrm>
-            <a:off x="685800" y="1143000"/>
-            <a:ext cx="5486400" cy="3086100"/>
-          </a:xfrm>
-          <a:prstGeom prst="rect">
-            <a:avLst/>
-          </a:prstGeom>
-          <a:noFill/>
-          <a:ln w="12700">
-            <a:solidFill>
-              <a:prstClr val="black"/>
-            </a:solidFill>
-          </a:ln>
-        </p:spPr>
-        <p:txBody>
-          <a:bodyPr vert="horz" lIns="91440" tIns="45720" rIns="91440" bIns="45720" rtlCol="0" anchor="ctr"/>
-          <a:lstStyle/>
-          <a:p>
-            <a:endParaRPr lang="en-US"/>
-          </a:p>
-        </p:txBody>
-      </p:sp>
-      <p:sp>
-        <p:nvSpPr>
-          <p:cNvPr id="5" name="Notes Placeholder 4"/>
-          <p:cNvSpPr>
-            <a:spLocks noGrp="1"/>
-          </p:cNvSpPr>
-          <p:nvPr>
-            <p:ph type="body" sz="quarter" idx="3"/>
-          </p:nvPr>
-        </p:nvSpPr>
-        <p:spPr>
-          <a:xfrm>
-            <a:off x="685800" y="4400550"/>
-            <a:ext cx="5486400" cy="3600450"/>
-          </a:xfrm>
-          <a:prstGeom prst="rect">
-            <a:avLst/>
-          </a:prstGeom>
-        </p:spPr>
-        <p:txBody>
-          <a:bodyPr vert="horz" lIns="91440" tIns="45720" rIns="91440" bIns="45720" rtlCol="0"/>
-          <a:lstStyle/>
-          <a:p>
-            <a:pPr lvl="0"/>
-            <a:r>
-              <a:rPr lang="en-US"/>
-              <a:t>Click to edit Master text styles</a:t>
-            </a:r>
-          </a:p>
-          <a:p>
-            <a:pPr lvl="1"/>
-            <a:r>
-              <a:rPr lang="en-US"/>
-              <a:t>Second level</a:t>
-            </a:r>
-          </a:p>
-          <a:p>
-            <a:pPr lvl="2"/>
-            <a:r>
-              <a:rPr lang="en-US"/>
-              <a:t>Third level</a:t>
-            </a:r>
-          </a:p>
-          <a:p>
-            <a:pPr lvl="3"/>
-            <a:r>
-              <a:rPr lang="en-US"/>
-              <a:t>Fourth level</a:t>
-            </a:r>
-          </a:p>
-          <a:p>
-            <a:pPr lvl="4"/>
-            <a:r>
-              <a:rPr lang="en-US"/>
-              <a:t>Fifth level</a:t>
-            </a:r>
-          </a:p>
-        </p:txBody>
-      </p:sp>
-      <p:sp>
-        <p:nvSpPr>
-          <p:cNvPr id="6" name="Footer Placeholder 5"/>
-          <p:cNvSpPr>
-            <a:spLocks noGrp="1"/>
-          </p:cNvSpPr>
-          <p:nvPr>
-            <p:ph type="ftr" sz="quarter" idx="4"/>
-          </p:nvPr>
-        </p:nvSpPr>
-        <p:spPr>
-          <a:xfrm>
-            <a:off x="0" y="8685213"/>
-            <a:ext cx="2971800" cy="458787"/>
-          </a:xfrm>
-          <a:prstGeom prst="rect">
-            <a:avLst/>
-          </a:prstGeom>
-        </p:spPr>
-        <p:txBody>
-          <a:bodyPr vert="horz" lIns="91440" tIns="45720" rIns="91440" bIns="45720" rtlCol="0" anchor="b"/>
-          <a:lstStyle>
-            <a:lvl1pPr algn="l">
-              <a:defRPr sz="1200"/>
-            </a:lvl1pPr>
-          </a:lstStyle>
-          <a:p>
-            <a:endParaRPr lang="en-US"/>
-          </a:p>
-        </p:txBody>
-      </p:sp>
-      <p:sp>
-        <p:nvSpPr>
-          <p:cNvPr id="7" name="Slide Number Placeholder 6"/>
-          <p:cNvSpPr>
-            <a:spLocks noGrp="1"/>
-          </p:cNvSpPr>
-          <p:nvPr>
-            <p:ph type="sldNum" sz="quarter" idx="5"/>
-          </p:nvPr>
-        </p:nvSpPr>
-        <p:spPr>
-          <a:xfrm>
-            <a:off x="3884613" y="8685213"/>
-            <a:ext cx="2971800" cy="458787"/>
-          </a:xfrm>
-          <a:prstGeom prst="rect">
-            <a:avLst/>
-          </a:prstGeom>
-        </p:spPr>
-        <p:txBody>
-          <a:bodyPr vert="horz" lIns="91440" tIns="45720" rIns="91440" bIns="45720" rtlCol="0" anchor="b"/>
-          <a:lstStyle>
-            <a:lvl1pPr algn="r">
-              <a:defRPr sz="1200"/>
-            </a:lvl1pPr>
-          </a:lstStyle>
-          <a:p>
-            <a:fld id="{CE5E9CC1-C706-0F49-92D6-E571CC5EEA8F}" type="slidenum">
-              <a:rPr lang="en-US"/>
-              <a:t>‹#›</a:t>
-            </a:fld>
-            <a:endParaRPr lang="en-US"/>
-          </a:p>
-        </p:txBody>
-      </p:sp>
     </p:spTree>
     <p:extLst>
       <p:ext uri="{BB962C8B-B14F-4D97-AF65-F5344CB8AC3E}">
-        <p14:creationId xmlns:p14="http://schemas.microsoft.com/office/powerpoint/2010/main" val="1024086991"/>
+        <p14:creationId xmlns:p14="http://schemas.microsoft.com/office/powerpoint/2010/main" val="3711771770"/>
       </p:ext>
     </p:extLst>
   </p:cSld>
@@ -511,10 +292,6 @@
           <a:bodyPr/>
           <a:lstStyle/>
           <a:p>
-            <a:r>
-              <a:rPr lang="en-US" dirty="0"/>
-              <a:t/>
-            </a:r>
             <a:endParaRPr lang="en-US" dirty="0"/>
           </a:p>
         </p:txBody>
@@ -599,10 +376,6 @@
           <a:bodyPr/>
           <a:lstStyle/>
           <a:p>
-            <a:r>
-              <a:rPr lang="en-US" dirty="0"/>
-              <a:t/>
-            </a:r>
             <a:endParaRPr lang="en-US" dirty="0"/>
           </a:p>
         </p:txBody>
@@ -687,10 +460,6 @@
           <a:bodyPr/>
           <a:lstStyle/>
           <a:p>
-            <a:r>
-              <a:rPr lang="en-US" dirty="0"/>
-              <a:t/>
-            </a:r>
             <a:endParaRPr lang="en-US" dirty="0"/>
           </a:p>
         </p:txBody>
@@ -775,10 +544,6 @@
           <a:bodyPr/>
           <a:lstStyle/>
           <a:p>
-            <a:r>
-              <a:rPr lang="en-US" dirty="0"/>
-              <a:t/>
-            </a:r>
             <a:endParaRPr lang="en-US" dirty="0"/>
           </a:p>
         </p:txBody>
@@ -863,10 +628,6 @@
           <a:bodyPr/>
           <a:lstStyle/>
           <a:p>
-            <a:r>
-              <a:rPr lang="en-US" dirty="0"/>
-              <a:t/>
-            </a:r>
             <a:endParaRPr lang="en-US" dirty="0"/>
           </a:p>
         </p:txBody>
@@ -951,10 +712,6 @@
           <a:bodyPr/>
           <a:lstStyle/>
           <a:p>
-            <a:r>
-              <a:rPr lang="en-US" dirty="0"/>
-              <a:t/>
-            </a:r>
             <a:endParaRPr lang="en-US" dirty="0"/>
           </a:p>
         </p:txBody>
@@ -1039,10 +796,6 @@
           <a:bodyPr/>
           <a:lstStyle/>
           <a:p>
-            <a:r>
-              <a:rPr lang="en-US" dirty="0"/>
-              <a:t/>
-            </a:r>
             <a:endParaRPr lang="en-US" dirty="0"/>
           </a:p>
         </p:txBody>
@@ -1127,10 +880,6 @@
           <a:bodyPr/>
           <a:lstStyle/>
           <a:p>
-            <a:r>
-              <a:rPr lang="en-US" dirty="0"/>
-              <a:t/>
-            </a:r>
             <a:endParaRPr lang="en-US" dirty="0"/>
           </a:p>
         </p:txBody>
@@ -1215,10 +964,6 @@
           <a:bodyPr/>
           <a:lstStyle/>
           <a:p>
-            <a:r>
-              <a:rPr lang="en-US" dirty="0"/>
-              <a:t/>
-            </a:r>
             <a:endParaRPr lang="en-US" dirty="0"/>
           </a:p>
         </p:txBody>
@@ -1303,10 +1048,6 @@
           <a:bodyPr/>
           <a:lstStyle/>
           <a:p>
-            <a:r>
-              <a:rPr lang="en-US" dirty="0"/>
-              <a:t/>
-            </a:r>
             <a:endParaRPr lang="en-US" dirty="0"/>
           </a:p>
         </p:txBody>
@@ -1391,10 +1132,6 @@
           <a:bodyPr/>
           <a:lstStyle/>
           <a:p>
-            <a:r>
-              <a:rPr lang="en-US" dirty="0"/>
-              <a:t/>
-            </a:r>
             <a:endParaRPr lang="en-US" dirty="0"/>
           </a:p>
         </p:txBody>
@@ -1479,10 +1216,6 @@
           <a:bodyPr/>
           <a:lstStyle/>
           <a:p>
-            <a:r>
-              <a:rPr lang="en-US" dirty="0"/>
-              <a:t/>
-            </a:r>
             <a:endParaRPr lang="en-US" dirty="0"/>
           </a:p>
         </p:txBody>
@@ -1556,6 +1289,11 @@
 <file path=ppt/slideMasters/slideMaster1.xml><?xml version="1.0" encoding="utf-8"?>
 <p:sldMaster xmlns:a="http://schemas.openxmlformats.org/drawingml/2006/main" xmlns:r="http://schemas.openxmlformats.org/officeDocument/2006/relationships" xmlns:p="http://schemas.openxmlformats.org/presentationml/2006/main">
   <p:cSld>
+    <p:bg>
+      <p:bgRef idx="1001">
+        <a:schemeClr val="bg1"/>
+      </p:bgRef>
+    </p:bg>
     <p:spTree>
       <p:nvGrpSpPr>
         <p:cNvPr id="1" name=""/>
@@ -1838,6 +1576,7 @@
         <a:solidFill>
           <a:srgbClr val="8E1B1B"/>
         </a:solidFill>
+        <a:effectLst/>
       </p:bgPr>
     </p:bg>
     <p:spTree>
@@ -1975,11 +1714,11 @@
           <a:bodyPr wrap="square" lIns="0" tIns="0" rIns="0" bIns="0" rtlCol="0" anchor="t"/>
           <a:lstStyle/>
           <a:p>
-            <a:pPr indent="0" marL="0">
-              <a:buNone/>
-            </a:pPr>
-            <a:r>
-              <a:rPr lang="en-US" sz="1100" b="1" spc="200" kern="0" dirty="0">
+            <a:pPr marL="0" indent="0">
+              <a:buNone/>
+            </a:pPr>
+            <a:r>
+              <a:rPr lang="en-US" sz="1100" b="1" kern="0" spc="200" dirty="0">
                 <a:solidFill>
                   <a:srgbClr val="FFB800"/>
                 </a:solidFill>
@@ -1987,7 +1726,7 @@
                 <a:ea typeface="Calibri" pitchFamily="34" charset="-122"/>
                 <a:cs typeface="Calibri" pitchFamily="34" charset="-120"/>
               </a:rPr>
-              <a:t>OSSP · 25CS2104E · SECTION 08 · TEAM 09</a:t>
+              <a:t>OSSP · 25CS2104E · SECTION 08 · TEAM 13</a:t>
             </a:r>
             <a:endParaRPr lang="en-US" sz="1100" dirty="0"/>
           </a:p>
@@ -2014,7 +1753,7 @@
           <a:bodyPr wrap="square" lIns="0" tIns="0" rIns="0" bIns="0" rtlCol="0" anchor="t"/>
           <a:lstStyle/>
           <a:p>
-            <a:pPr indent="0" marL="0">
+            <a:pPr marL="0" indent="0">
               <a:buNone/>
             </a:pPr>
             <a:r>
@@ -2053,7 +1792,7 @@
           <a:bodyPr wrap="square" lIns="0" tIns="0" rIns="0" bIns="0" rtlCol="0" anchor="t"/>
           <a:lstStyle/>
           <a:p>
-            <a:pPr indent="0" marL="0">
+            <a:pPr marL="0" indent="0">
               <a:buNone/>
             </a:pPr>
             <a:r>
@@ -2092,7 +1831,7 @@
           </a:solidFill>
           <a:ln/>
           <a:effectLst>
-            <a:outerShdw sx="100000" sy="100000" kx="0" ky="0" algn="bl" rotWithShape="0" blurRad="101600" dist="38100" dir="5400000">
+            <a:outerShdw blurRad="101600" dist="38100" dir="5400000" algn="bl" rotWithShape="0">
               <a:srgbClr val="000000">
                 <a:alpha val="20000"/>
               </a:srgbClr>
@@ -2121,11 +1860,11 @@
           <a:bodyPr wrap="square" lIns="0" tIns="0" rIns="0" bIns="0" rtlCol="0" anchor="t"/>
           <a:lstStyle/>
           <a:p>
-            <a:pPr indent="0" marL="0">
-              <a:buNone/>
-            </a:pPr>
-            <a:r>
-              <a:rPr lang="en-US" sz="1200" b="1" spc="200" kern="0" dirty="0">
+            <a:pPr marL="0" indent="0">
+              <a:buNone/>
+            </a:pPr>
+            <a:r>
+              <a:rPr lang="en-US" sz="1200" b="1" kern="0" spc="200" dirty="0">
                 <a:solidFill>
                   <a:srgbClr val="C1272D"/>
                 </a:solidFill>
@@ -2133,7 +1872,7 @@
                 <a:ea typeface="Calibri" pitchFamily="34" charset="-122"/>
                 <a:cs typeface="Calibri" pitchFamily="34" charset="-120"/>
               </a:rPr>
-              <a:t>TEAM 09</a:t>
+              <a:t>TEAM 13</a:t>
             </a:r>
             <a:endParaRPr lang="en-US" sz="1200" dirty="0"/>
           </a:p>
@@ -2180,7 +1919,7 @@
           <a:bodyPr wrap="square" lIns="0" tIns="0" rIns="0" bIns="0" rtlCol="0" anchor="ctr"/>
           <a:lstStyle/>
           <a:p>
-            <a:pPr algn="ctr" indent="0" marL="0">
+            <a:pPr marL="0" indent="0" algn="ctr">
               <a:buNone/>
             </a:pPr>
             <a:r>
@@ -2219,7 +1958,7 @@
           <a:bodyPr wrap="square" lIns="0" tIns="0" rIns="0" bIns="0" rtlCol="0" anchor="t"/>
           <a:lstStyle/>
           <a:p>
-            <a:pPr indent="0" marL="0">
+            <a:pPr marL="0" indent="0">
               <a:buNone/>
             </a:pPr>
             <a:r>
@@ -2258,7 +1997,7 @@
           <a:bodyPr wrap="square" lIns="0" tIns="0" rIns="0" bIns="0" rtlCol="0" anchor="t"/>
           <a:lstStyle/>
           <a:p>
-            <a:pPr indent="0" marL="0">
+            <a:pPr marL="0" indent="0">
               <a:buNone/>
             </a:pPr>
             <a:r>
@@ -2317,7 +2056,7 @@
           <a:bodyPr wrap="square" lIns="0" tIns="0" rIns="0" bIns="0" rtlCol="0" anchor="ctr"/>
           <a:lstStyle/>
           <a:p>
-            <a:pPr algn="ctr" indent="0" marL="0">
+            <a:pPr marL="0" indent="0" algn="ctr">
               <a:buNone/>
             </a:pPr>
             <a:r>
@@ -2356,7 +2095,7 @@
           <a:bodyPr wrap="square" lIns="0" tIns="0" rIns="0" bIns="0" rtlCol="0" anchor="t"/>
           <a:lstStyle/>
           <a:p>
-            <a:pPr indent="0" marL="0">
+            <a:pPr marL="0" indent="0">
               <a:buNone/>
             </a:pPr>
             <a:r>
@@ -2395,7 +2134,7 @@
           <a:bodyPr wrap="square" lIns="0" tIns="0" rIns="0" bIns="0" rtlCol="0" anchor="t"/>
           <a:lstStyle/>
           <a:p>
-            <a:pPr indent="0" marL="0">
+            <a:pPr marL="0" indent="0">
               <a:buNone/>
             </a:pPr>
             <a:r>
@@ -2454,7 +2193,7 @@
           <a:bodyPr wrap="square" lIns="0" tIns="0" rIns="0" bIns="0" rtlCol="0" anchor="ctr"/>
           <a:lstStyle/>
           <a:p>
-            <a:pPr algn="ctr" indent="0" marL="0">
+            <a:pPr marL="0" indent="0" algn="ctr">
               <a:buNone/>
             </a:pPr>
             <a:r>
@@ -2493,7 +2232,7 @@
           <a:bodyPr wrap="square" lIns="0" tIns="0" rIns="0" bIns="0" rtlCol="0" anchor="t"/>
           <a:lstStyle/>
           <a:p>
-            <a:pPr indent="0" marL="0">
+            <a:pPr marL="0" indent="0">
               <a:buNone/>
             </a:pPr>
             <a:r>
@@ -2532,7 +2271,7 @@
           <a:bodyPr wrap="square" lIns="0" tIns="0" rIns="0" bIns="0" rtlCol="0" anchor="t"/>
           <a:lstStyle/>
           <a:p>
-            <a:pPr indent="0" marL="0">
+            <a:pPr marL="0" indent="0">
               <a:buNone/>
             </a:pPr>
             <a:r>
@@ -2591,7 +2330,7 @@
           <a:bodyPr wrap="square" lIns="0" tIns="0" rIns="0" bIns="0" rtlCol="0" anchor="ctr"/>
           <a:lstStyle/>
           <a:p>
-            <a:pPr algn="ctr" indent="0" marL="0">
+            <a:pPr marL="0" indent="0" algn="ctr">
               <a:buNone/>
             </a:pPr>
             <a:r>
@@ -2630,7 +2369,7 @@
           <a:bodyPr wrap="square" lIns="0" tIns="0" rIns="0" bIns="0" rtlCol="0" anchor="t"/>
           <a:lstStyle/>
           <a:p>
-            <a:pPr indent="0" marL="0">
+            <a:pPr marL="0" indent="0">
               <a:buNone/>
             </a:pPr>
             <a:r>
@@ -2669,7 +2408,7 @@
           <a:bodyPr wrap="square" lIns="0" tIns="0" rIns="0" bIns="0" rtlCol="0" anchor="t"/>
           <a:lstStyle/>
           <a:p>
-            <a:pPr indent="0" marL="0">
+            <a:pPr marL="0" indent="0">
               <a:buNone/>
             </a:pPr>
             <a:r>
@@ -2706,6 +2445,7 @@
         <a:solidFill>
           <a:srgbClr val="FFF3DC"/>
         </a:solidFill>
+        <a:effectLst/>
       </p:bgPr>
     </p:bg>
     <p:spTree>
@@ -2803,7 +2543,7 @@
           <a:bodyPr wrap="square" lIns="0" tIns="0" rIns="0" bIns="0" rtlCol="0" anchor="ctr"/>
           <a:lstStyle/>
           <a:p>
-            <a:pPr indent="0" marL="0">
+            <a:pPr marL="0" indent="0">
               <a:buNone/>
             </a:pPr>
             <a:r>
@@ -2842,7 +2582,7 @@
           <a:bodyPr wrap="square" lIns="0" tIns="0" rIns="0" bIns="0" rtlCol="0" anchor="t"/>
           <a:lstStyle/>
           <a:p>
-            <a:pPr indent="0" marL="0">
+            <a:pPr marL="0" indent="0">
               <a:buNone/>
             </a:pPr>
             <a:r>
@@ -2856,9 +2596,6 @@
               </a:rPr>
               <a:t>DISK  </a:t>
             </a:r>
-            <a:pPr indent="0" marL="0">
-              <a:buNone/>
-            </a:pPr>
             <a:r>
               <a:rPr lang="en-US" sz="1200" dirty="0">
                 <a:solidFill>
@@ -2895,7 +2632,7 @@
           <a:bodyPr wrap="square" lIns="0" tIns="0" rIns="0" bIns="0" rtlCol="0" anchor="t"/>
           <a:lstStyle/>
           <a:p>
-            <a:pPr indent="0" marL="0">
+            <a:pPr marL="0" indent="0">
               <a:buNone/>
             </a:pPr>
             <a:r>
@@ -2909,9 +2646,6 @@
               </a:rPr>
               <a:t>UPTIME  </a:t>
             </a:r>
-            <a:pPr indent="0" marL="0">
-              <a:buNone/>
-            </a:pPr>
             <a:r>
               <a:rPr lang="en-US" sz="1200" dirty="0">
                 <a:solidFill>
@@ -2953,7 +2687,7 @@
             <a:prstDash val="solid"/>
           </a:ln>
           <a:effectLst>
-            <a:outerShdw sx="100000" sy="100000" kx="0" ky="0" algn="bl" rotWithShape="0" blurRad="101600" dist="38100" dir="5400000">
+            <a:outerShdw blurRad="101600" dist="38100" dir="5400000" algn="bl" rotWithShape="0">
               <a:srgbClr val="000000">
                 <a:alpha val="20000"/>
               </a:srgbClr>
@@ -3042,7 +2776,7 @@
           <a:bodyPr wrap="square" lIns="0" tIns="0" rIns="0" bIns="0" rtlCol="0" anchor="t"/>
           <a:lstStyle/>
           <a:p>
-            <a:pPr algn="ctr" indent="0" marL="0">
+            <a:pPr marL="0" indent="0" algn="ctr">
               <a:buNone/>
             </a:pPr>
             <a:r>
@@ -3062,14 +2796,14 @@
       </p:sp>
       <p:pic>
         <p:nvPicPr>
-          <p:cNvPr id="13" name="Image 0" descr="/mnt/user-data/uploads/1790225569766_image.png">    </p:cNvPr>
+          <p:cNvPr id="13" name="Image 0" descr="/mnt/user-data/uploads/1790225569766_image.png"/>
           <p:cNvPicPr>
             <a:picLocks noChangeAspect="1"/>
           </p:cNvPicPr>
           <p:nvPr/>
         </p:nvPicPr>
         <p:blipFill>
-          <a:blip r:embed="rId1"/>
+          <a:blip r:embed="rId3"/>
           <a:stretch>
             <a:fillRect/>
           </a:stretch>
@@ -3110,7 +2844,7 @@
             <a:prstDash val="solid"/>
           </a:ln>
           <a:effectLst>
-            <a:outerShdw sx="100000" sy="100000" kx="0" ky="0" algn="bl" rotWithShape="0" blurRad="101600" dist="38100" dir="5400000">
+            <a:outerShdw blurRad="101600" dist="38100" dir="5400000" algn="bl" rotWithShape="0">
               <a:srgbClr val="000000">
                 <a:alpha val="20000"/>
               </a:srgbClr>
@@ -3199,7 +2933,7 @@
           <a:bodyPr wrap="square" lIns="0" tIns="0" rIns="0" bIns="0" rtlCol="0" anchor="t"/>
           <a:lstStyle/>
           <a:p>
-            <a:pPr algn="ctr" indent="0" marL="0">
+            <a:pPr marL="0" indent="0" algn="ctr">
               <a:buNone/>
             </a:pPr>
             <a:r>
@@ -3219,14 +2953,14 @@
       </p:sp>
       <p:pic>
         <p:nvPicPr>
-          <p:cNvPr id="19" name="Image 1" descr="/mnt/user-data/uploads/1790225663652_image.png">    </p:cNvPr>
+          <p:cNvPr id="19" name="Image 1" descr="/mnt/user-data/uploads/1790225663652_image.png"/>
           <p:cNvPicPr>
             <a:picLocks noChangeAspect="1"/>
           </p:cNvPicPr>
           <p:nvPr/>
         </p:nvPicPr>
         <p:blipFill>
-          <a:blip r:embed="rId2"/>
+          <a:blip r:embed="rId4"/>
           <a:stretch>
             <a:fillRect/>
           </a:stretch>
@@ -3247,7 +2981,7 @@
     <a:masterClrMapping/>
   </p:clrMapOvr>
   <p:transition spd="med">
-    <p:split orient="horz" dir="out"/>
+    <p:split/>
   </p:transition>
 </p:sld>
 </file>
@@ -3260,6 +2994,7 @@
         <a:solidFill>
           <a:srgbClr val="FFF3DC"/>
         </a:solidFill>
+        <a:effectLst/>
       </p:bgPr>
     </p:bg>
     <p:spTree>
@@ -3357,7 +3092,7 @@
           <a:bodyPr wrap="square" lIns="0" tIns="0" rIns="0" bIns="0" rtlCol="0" anchor="ctr"/>
           <a:lstStyle/>
           <a:p>
-            <a:pPr indent="0" marL="0">
+            <a:pPr marL="0" indent="0">
               <a:buNone/>
             </a:pPr>
             <a:r>
@@ -3502,7 +3237,7 @@
           </a:solidFill>
           <a:ln/>
           <a:effectLst>
-            <a:outerShdw sx="100000" sy="100000" kx="0" ky="0" algn="bl" rotWithShape="0" blurRad="101600" dist="38100" dir="5400000">
+            <a:outerShdw blurRad="101600" dist="38100" dir="5400000" algn="bl" rotWithShape="0">
               <a:srgbClr val="000000">
                 <a:alpha val="20000"/>
               </a:srgbClr>
@@ -3531,7 +3266,7 @@
           <a:bodyPr wrap="square" lIns="0" tIns="0" rIns="0" bIns="0" rtlCol="0" anchor="ctr"/>
           <a:lstStyle/>
           <a:p>
-            <a:pPr indent="0" marL="0">
+            <a:pPr marL="0" indent="0">
               <a:buNone/>
             </a:pPr>
             <a:r>
@@ -3570,7 +3305,7 @@
           <a:bodyPr wrap="square" lIns="0" tIns="0" rIns="0" bIns="0" rtlCol="0" anchor="ctr"/>
           <a:lstStyle/>
           <a:p>
-            <a:pPr indent="0" marL="0">
+            <a:pPr marL="0" indent="0">
               <a:buNone/>
             </a:pPr>
             <a:r>
@@ -3614,7 +3349,7 @@
             <a:prstDash val="solid"/>
           </a:ln>
           <a:effectLst>
-            <a:outerShdw sx="100000" sy="100000" kx="0" ky="0" algn="bl" rotWithShape="0" blurRad="101600" dist="38100" dir="5400000">
+            <a:outerShdw blurRad="101600" dist="38100" dir="5400000" algn="bl" rotWithShape="0">
               <a:srgbClr val="000000">
                 <a:alpha val="20000"/>
               </a:srgbClr>
@@ -3703,7 +3438,7 @@
           <a:bodyPr wrap="square" lIns="0" tIns="0" rIns="0" bIns="0" rtlCol="0" anchor="t"/>
           <a:lstStyle/>
           <a:p>
-            <a:pPr algn="ctr" indent="0" marL="0">
+            <a:pPr marL="0" indent="0" algn="ctr">
               <a:buNone/>
             </a:pPr>
             <a:r>
@@ -3723,14 +3458,14 @@
       </p:sp>
       <p:pic>
         <p:nvPicPr>
-          <p:cNvPr id="15" name="Image 0" descr="/mnt/user-data/uploads/1790225647306_image.png">    </p:cNvPr>
+          <p:cNvPr id="15" name="Image 0" descr="/mnt/user-data/uploads/1790225647306_image.png"/>
           <p:cNvPicPr>
             <a:picLocks noChangeAspect="1"/>
           </p:cNvPicPr>
           <p:nvPr/>
         </p:nvPicPr>
         <p:blipFill>
-          <a:blip r:embed="rId1"/>
+          <a:blip r:embed="rId3"/>
           <a:stretch>
             <a:fillRect/>
           </a:stretch>
@@ -3751,7 +3486,7 @@
     <a:masterClrMapping/>
   </p:clrMapOvr>
   <p:transition spd="med">
-    <p:cover dir="l"/>
+    <p:cover/>
   </p:transition>
 </p:sld>
 </file>
@@ -3764,6 +3499,7 @@
         <a:solidFill>
           <a:srgbClr val="8E1B1B"/>
         </a:solidFill>
+        <a:effectLst/>
       </p:bgPr>
     </p:bg>
     <p:spTree>
@@ -3881,7 +3617,7 @@
           <a:bodyPr wrap="square" lIns="0" tIns="0" rIns="0" bIns="0" rtlCol="0" anchor="ctr"/>
           <a:lstStyle/>
           <a:p>
-            <a:pPr indent="0" marL="0">
+            <a:pPr marL="0" indent="0">
               <a:buNone/>
             </a:pPr>
             <a:r>
@@ -3920,7 +3656,7 @@
           <a:bodyPr wrap="square" lIns="0" tIns="0" rIns="0" bIns="0" rtlCol="0" anchor="t"/>
           <a:lstStyle/>
           <a:p>
-            <a:pPr indent="0" marL="0">
+            <a:pPr marL="0" indent="0">
               <a:buNone/>
             </a:pPr>
             <a:r>
@@ -3959,7 +3695,7 @@
           </a:solidFill>
           <a:ln/>
           <a:effectLst>
-            <a:outerShdw sx="100000" sy="100000" kx="0" ky="0" algn="bl" rotWithShape="0" blurRad="101600" dist="38100" dir="5400000">
+            <a:outerShdw blurRad="101600" dist="38100" dir="5400000" algn="bl" rotWithShape="0">
               <a:srgbClr val="000000">
                 <a:alpha val="20000"/>
               </a:srgbClr>
@@ -3988,7 +3724,7 @@
           <a:bodyPr wrap="square" lIns="0" tIns="0" rIns="0" bIns="0" rtlCol="0" anchor="ctr"/>
           <a:lstStyle/>
           <a:p>
-            <a:pPr indent="0" marL="0">
+            <a:pPr marL="0" indent="0">
               <a:buNone/>
             </a:pPr>
             <a:r>
@@ -4027,7 +3763,7 @@
           <a:bodyPr wrap="square" lIns="0" tIns="0" rIns="0" bIns="0" rtlCol="0" anchor="t"/>
           <a:lstStyle/>
           <a:p>
-            <a:pPr indent="0" marL="0">
+            <a:pPr marL="0" indent="0">
               <a:buNone/>
             </a:pPr>
             <a:r>
@@ -4066,7 +3802,7 @@
           </a:solidFill>
           <a:ln/>
           <a:effectLst>
-            <a:outerShdw sx="100000" sy="100000" kx="0" ky="0" algn="bl" rotWithShape="0" blurRad="101600" dist="38100" dir="5400000">
+            <a:outerShdw blurRad="101600" dist="38100" dir="5400000" algn="bl" rotWithShape="0">
               <a:srgbClr val="000000">
                 <a:alpha val="20000"/>
               </a:srgbClr>
@@ -4095,7 +3831,7 @@
           <a:bodyPr wrap="square" lIns="0" tIns="0" rIns="0" bIns="0" rtlCol="0" anchor="ctr"/>
           <a:lstStyle/>
           <a:p>
-            <a:pPr indent="0" marL="0">
+            <a:pPr marL="0" indent="0">
               <a:buNone/>
             </a:pPr>
             <a:r>
@@ -4134,7 +3870,7 @@
           <a:bodyPr wrap="square" lIns="0" tIns="0" rIns="0" bIns="0" rtlCol="0" anchor="t"/>
           <a:lstStyle/>
           <a:p>
-            <a:pPr indent="0" marL="0">
+            <a:pPr marL="0" indent="0">
               <a:buNone/>
             </a:pPr>
             <a:r>
@@ -4173,7 +3909,7 @@
           </a:solidFill>
           <a:ln/>
           <a:effectLst>
-            <a:outerShdw sx="100000" sy="100000" kx="0" ky="0" algn="bl" rotWithShape="0" blurRad="101600" dist="38100" dir="5400000">
+            <a:outerShdw blurRad="101600" dist="38100" dir="5400000" algn="bl" rotWithShape="0">
               <a:srgbClr val="000000">
                 <a:alpha val="20000"/>
               </a:srgbClr>
@@ -4202,7 +3938,7 @@
           <a:bodyPr wrap="square" lIns="0" tIns="0" rIns="0" bIns="0" rtlCol="0" anchor="ctr"/>
           <a:lstStyle/>
           <a:p>
-            <a:pPr indent="0" marL="0">
+            <a:pPr marL="0" indent="0">
               <a:buNone/>
             </a:pPr>
             <a:r>
@@ -4241,7 +3977,7 @@
           <a:bodyPr wrap="square" lIns="0" tIns="0" rIns="0" bIns="0" rtlCol="0" anchor="t"/>
           <a:lstStyle/>
           <a:p>
-            <a:pPr indent="0" marL="0">
+            <a:pPr marL="0" indent="0">
               <a:buNone/>
             </a:pPr>
             <a:r>
@@ -4302,7 +4038,7 @@
           <a:bodyPr wrap="square" lIns="0" tIns="0" rIns="0" bIns="0" rtlCol="0" anchor="ctr"/>
           <a:lstStyle/>
           <a:p>
-            <a:pPr algn="ctr" indent="0" marL="0">
+            <a:pPr marL="0" indent="0" algn="ctr">
               <a:buNone/>
             </a:pPr>
             <a:r>
@@ -4339,6 +4075,7 @@
         <a:solidFill>
           <a:srgbClr val="FFF3DC"/>
         </a:solidFill>
+        <a:effectLst/>
       </p:bgPr>
     </p:bg>
     <p:spTree>
@@ -4436,7 +4173,7 @@
           <a:bodyPr wrap="square" lIns="0" tIns="0" rIns="0" bIns="0" rtlCol="0" anchor="ctr"/>
           <a:lstStyle/>
           <a:p>
-            <a:pPr indent="0" marL="0">
+            <a:pPr marL="0" indent="0">
               <a:buNone/>
             </a:pPr>
             <a:r>
@@ -4475,7 +4212,7 @@
           </a:solidFill>
           <a:ln/>
           <a:effectLst>
-            <a:outerShdw sx="100000" sy="100000" kx="0" ky="0" algn="bl" rotWithShape="0" blurRad="101600" dist="38100" dir="5400000">
+            <a:outerShdw blurRad="101600" dist="38100" dir="5400000" algn="bl" rotWithShape="0">
               <a:srgbClr val="000000">
                 <a:alpha val="20000"/>
               </a:srgbClr>
@@ -4504,7 +4241,7 @@
           <a:bodyPr wrap="square" lIns="0" tIns="0" rIns="0" bIns="0" rtlCol="0" anchor="ctr"/>
           <a:lstStyle/>
           <a:p>
-            <a:pPr indent="0" marL="0">
+            <a:pPr marL="0" indent="0">
               <a:buNone/>
             </a:pPr>
             <a:r>
@@ -4521,7 +4258,7 @@
             <a:endParaRPr lang="en-US" sz="2600" dirty="0"/>
           </a:p>
           <a:p>
-            <a:pPr indent="0" marL="0">
+            <a:pPr marL="0" indent="0">
               <a:buNone/>
             </a:pPr>
             <a:r>
@@ -4538,7 +4275,7 @@
             <a:endParaRPr lang="en-US" sz="2600" dirty="0"/>
           </a:p>
           <a:p>
-            <a:pPr indent="0" marL="0">
+            <a:pPr marL="0" indent="0">
               <a:buNone/>
             </a:pPr>
             <a:r>
@@ -4578,251 +4315,7 @@
       </p:sp>
       <p:pic>
         <p:nvPicPr>
-          <p:cNvPr id="9" name="Image 0" descr="preencoded.png">    </p:cNvPr>
-          <p:cNvPicPr>
-            <a:picLocks noChangeAspect="1"/>
-          </p:cNvPicPr>
-          <p:nvPr/>
-        </p:nvPicPr>
-        <p:blipFill>
-          <a:blip r:embed="rId1"/>
-          <a:stretch>
-            <a:fillRect/>
-          </a:stretch>
-        </p:blipFill>
-        <p:spPr>
-          <a:xfrm>
-            <a:off x="4480560" y="1737360"/>
-            <a:ext cx="365760" cy="365760"/>
-          </a:xfrm>
-          <a:prstGeom prst="rect">
-            <a:avLst/>
-          </a:prstGeom>
-        </p:spPr>
-      </p:pic>
-      <p:sp>
-        <p:nvSpPr>
-          <p:cNvPr id="10" name="Text 7"/>
-          <p:cNvSpPr txBox="1"/>
-          <p:nvPr/>
-        </p:nvSpPr>
-        <p:spPr>
-          <a:xfrm>
-            <a:off x="5257800" y="1508760"/>
-            <a:ext cx="3291840" cy="320040"/>
-          </a:xfrm>
-          <a:prstGeom prst="rect">
-            <a:avLst/>
-          </a:prstGeom>
-          <a:noFill/>
-          <a:ln/>
-        </p:spPr>
-        <p:txBody>
-          <a:bodyPr wrap="square" lIns="0" tIns="0" rIns="0" bIns="0" rtlCol="0" anchor="t"/>
-          <a:lstStyle/>
-          <a:p>
-            <a:pPr indent="0" marL="0">
-              <a:buNone/>
-            </a:pPr>
-            <a:r>
-              <a:rPr lang="en-US" sz="1700" b="1" dirty="0">
-                <a:solidFill>
-                  <a:srgbClr val="3B1D12"/>
-                </a:solidFill>
-                <a:latin typeface="Cambria" pitchFamily="34" charset="0"/>
-                <a:ea typeface="Cambria" pitchFamily="34" charset="-122"/>
-                <a:cs typeface="Cambria" pitchFamily="34" charset="-120"/>
-              </a:rPr>
-              <a:t>Competing processes</a:t>
-            </a:r>
-            <a:endParaRPr lang="en-US" sz="1700" dirty="0"/>
-          </a:p>
-        </p:txBody>
-      </p:sp>
-      <p:sp>
-        <p:nvSpPr>
-          <p:cNvPr id="11" name="Text 8"/>
-          <p:cNvSpPr txBox="1"/>
-          <p:nvPr/>
-        </p:nvSpPr>
-        <p:spPr>
-          <a:xfrm>
-            <a:off x="5257800" y="1847088"/>
-            <a:ext cx="3291840" cy="548640"/>
-          </a:xfrm>
-          <a:prstGeom prst="rect">
-            <a:avLst/>
-          </a:prstGeom>
-          <a:noFill/>
-          <a:ln/>
-        </p:spPr>
-        <p:txBody>
-          <a:bodyPr wrap="square" lIns="0" tIns="0" rIns="0" bIns="0" rtlCol="0" anchor="t"/>
-          <a:lstStyle/>
-          <a:p>
-            <a:pPr indent="0" marL="0">
-              <a:buNone/>
-            </a:pPr>
-            <a:r>
-              <a:rPr lang="en-US" sz="1400" dirty="0">
-                <a:solidFill>
-                  <a:srgbClr val="6B4A3A"/>
-                </a:solidFill>
-                <a:latin typeface="Calibri" pitchFamily="34" charset="0"/>
-                <a:ea typeface="Calibri" pitchFamily="34" charset="-122"/>
-                <a:cs typeface="Calibri" pitchFamily="34" charset="-120"/>
-              </a:rPr>
-              <a:t>Many processes share CPU, memory and disk at once.</a:t>
-            </a:r>
-            <a:endParaRPr lang="en-US" sz="1400" dirty="0"/>
-          </a:p>
-        </p:txBody>
-      </p:sp>
-      <p:sp>
-        <p:nvSpPr>
-          <p:cNvPr id="12" name="Shape 9"/>
-          <p:cNvSpPr/>
-          <p:nvPr/>
-        </p:nvSpPr>
-        <p:spPr>
-          <a:xfrm>
-            <a:off x="4297680" y="2606040"/>
-            <a:ext cx="731520" cy="731520"/>
-          </a:xfrm>
-          <a:prstGeom prst="ellipse">
-            <a:avLst/>
-          </a:prstGeom>
-          <a:solidFill>
-            <a:srgbClr val="C1272D"/>
-          </a:solidFill>
-          <a:ln/>
-        </p:spPr>
-      </p:sp>
-      <p:pic>
-        <p:nvPicPr>
-          <p:cNvPr id="13" name="Image 1" descr="preencoded.png">    </p:cNvPr>
-          <p:cNvPicPr>
-            <a:picLocks noChangeAspect="1"/>
-          </p:cNvPicPr>
-          <p:nvPr/>
-        </p:nvPicPr>
-        <p:blipFill>
-          <a:blip r:embed="rId2"/>
-          <a:stretch>
-            <a:fillRect/>
-          </a:stretch>
-        </p:blipFill>
-        <p:spPr>
-          <a:xfrm>
-            <a:off x="4480560" y="2788920"/>
-            <a:ext cx="365760" cy="365760"/>
-          </a:xfrm>
-          <a:prstGeom prst="rect">
-            <a:avLst/>
-          </a:prstGeom>
-        </p:spPr>
-      </p:pic>
-      <p:sp>
-        <p:nvSpPr>
-          <p:cNvPr id="14" name="Text 10"/>
-          <p:cNvSpPr txBox="1"/>
-          <p:nvPr/>
-        </p:nvSpPr>
-        <p:spPr>
-          <a:xfrm>
-            <a:off x="5257800" y="2560320"/>
-            <a:ext cx="3291840" cy="320040"/>
-          </a:xfrm>
-          <a:prstGeom prst="rect">
-            <a:avLst/>
-          </a:prstGeom>
-          <a:noFill/>
-          <a:ln/>
-        </p:spPr>
-        <p:txBody>
-          <a:bodyPr wrap="square" lIns="0" tIns="0" rIns="0" bIns="0" rtlCol="0" anchor="t"/>
-          <a:lstStyle/>
-          <a:p>
-            <a:pPr indent="0" marL="0">
-              <a:buNone/>
-            </a:pPr>
-            <a:r>
-              <a:rPr lang="en-US" sz="1700" b="1" dirty="0">
-                <a:solidFill>
-                  <a:srgbClr val="3B1D12"/>
-                </a:solidFill>
-                <a:latin typeface="Cambria" pitchFamily="34" charset="0"/>
-                <a:ea typeface="Cambria" pitchFamily="34" charset="-122"/>
-                <a:cs typeface="Cambria" pitchFamily="34" charset="-120"/>
-              </a:rPr>
-              <a:t>Hard for beginners</a:t>
-            </a:r>
-            <a:endParaRPr lang="en-US" sz="1700" dirty="0"/>
-          </a:p>
-        </p:txBody>
-      </p:sp>
-      <p:sp>
-        <p:nvSpPr>
-          <p:cNvPr id="15" name="Text 11"/>
-          <p:cNvSpPr txBox="1"/>
-          <p:nvPr/>
-        </p:nvSpPr>
-        <p:spPr>
-          <a:xfrm>
-            <a:off x="5257800" y="2898648"/>
-            <a:ext cx="3291840" cy="548640"/>
-          </a:xfrm>
-          <a:prstGeom prst="rect">
-            <a:avLst/>
-          </a:prstGeom>
-          <a:noFill/>
-          <a:ln/>
-        </p:spPr>
-        <p:txBody>
-          <a:bodyPr wrap="square" lIns="0" tIns="0" rIns="0" bIns="0" rtlCol="0" anchor="t"/>
-          <a:lstStyle/>
-          <a:p>
-            <a:pPr indent="0" marL="0">
-              <a:buNone/>
-            </a:pPr>
-            <a:r>
-              <a:rPr lang="en-US" sz="1400" dirty="0">
-                <a:solidFill>
-                  <a:srgbClr val="6B4A3A"/>
-                </a:solidFill>
-                <a:latin typeface="Calibri" pitchFamily="34" charset="0"/>
-                <a:ea typeface="Calibri" pitchFamily="34" charset="-122"/>
-                <a:cs typeface="Calibri" pitchFamily="34" charset="-120"/>
-              </a:rPr>
-              <a:t>Beginners struggle to see where resources go.</a:t>
-            </a:r>
-            <a:endParaRPr lang="en-US" sz="1400" dirty="0"/>
-          </a:p>
-        </p:txBody>
-      </p:sp>
-      <p:sp>
-        <p:nvSpPr>
-          <p:cNvPr id="16" name="Shape 12"/>
-          <p:cNvSpPr/>
-          <p:nvPr/>
-        </p:nvSpPr>
-        <p:spPr>
-          <a:xfrm>
-            <a:off x="4297680" y="3657600"/>
-            <a:ext cx="731520" cy="731520"/>
-          </a:xfrm>
-          <a:prstGeom prst="ellipse">
-            <a:avLst/>
-          </a:prstGeom>
-          <a:solidFill>
-            <a:srgbClr val="C1272D"/>
-          </a:solidFill>
-          <a:ln/>
-        </p:spPr>
-      </p:sp>
-      <p:pic>
-        <p:nvPicPr>
-          <p:cNvPr id="17" name="Image 2" descr="preencoded.png">    </p:cNvPr>
+          <p:cNvPr id="9" name="Image 0" descr="preencoded.png"/>
           <p:cNvPicPr>
             <a:picLocks noChangeAspect="1"/>
           </p:cNvPicPr>
@@ -4836,7 +4329,7 @@
         </p:blipFill>
         <p:spPr>
           <a:xfrm>
-            <a:off x="4480560" y="3840480"/>
+            <a:off x="4480560" y="1737360"/>
             <a:ext cx="365760" cy="365760"/>
           </a:xfrm>
           <a:prstGeom prst="rect">
@@ -4846,13 +4339,13 @@
       </p:pic>
       <p:sp>
         <p:nvSpPr>
-          <p:cNvPr id="18" name="Text 13"/>
-          <p:cNvSpPr txBox="1"/>
-          <p:nvPr/>
-        </p:nvSpPr>
-        <p:spPr>
-          <a:xfrm>
-            <a:off x="5257800" y="3611880"/>
+          <p:cNvPr id="10" name="Text 7"/>
+          <p:cNvSpPr txBox="1"/>
+          <p:nvPr/>
+        </p:nvSpPr>
+        <p:spPr>
+          <a:xfrm>
+            <a:off x="5257800" y="1508760"/>
             <a:ext cx="3291840" cy="320040"/>
           </a:xfrm>
           <a:prstGeom prst="rect">
@@ -4865,7 +4358,7 @@
           <a:bodyPr wrap="square" lIns="0" tIns="0" rIns="0" bIns="0" rtlCol="0" anchor="t"/>
           <a:lstStyle/>
           <a:p>
-            <a:pPr indent="0" marL="0">
+            <a:pPr marL="0" indent="0">
               <a:buNone/>
             </a:pPr>
             <a:r>
@@ -4877,6 +4370,250 @@
                 <a:ea typeface="Cambria" pitchFamily="34" charset="-122"/>
                 <a:cs typeface="Cambria" pitchFamily="34" charset="-120"/>
               </a:rPr>
+              <a:t>Competing processes</a:t>
+            </a:r>
+            <a:endParaRPr lang="en-US" sz="1700" dirty="0"/>
+          </a:p>
+        </p:txBody>
+      </p:sp>
+      <p:sp>
+        <p:nvSpPr>
+          <p:cNvPr id="11" name="Text 8"/>
+          <p:cNvSpPr txBox="1"/>
+          <p:nvPr/>
+        </p:nvSpPr>
+        <p:spPr>
+          <a:xfrm>
+            <a:off x="5257800" y="1847088"/>
+            <a:ext cx="3291840" cy="548640"/>
+          </a:xfrm>
+          <a:prstGeom prst="rect">
+            <a:avLst/>
+          </a:prstGeom>
+          <a:noFill/>
+          <a:ln/>
+        </p:spPr>
+        <p:txBody>
+          <a:bodyPr wrap="square" lIns="0" tIns="0" rIns="0" bIns="0" rtlCol="0" anchor="t"/>
+          <a:lstStyle/>
+          <a:p>
+            <a:pPr marL="0" indent="0">
+              <a:buNone/>
+            </a:pPr>
+            <a:r>
+              <a:rPr lang="en-US" sz="1400" dirty="0">
+                <a:solidFill>
+                  <a:srgbClr val="6B4A3A"/>
+                </a:solidFill>
+                <a:latin typeface="Calibri" pitchFamily="34" charset="0"/>
+                <a:ea typeface="Calibri" pitchFamily="34" charset="-122"/>
+                <a:cs typeface="Calibri" pitchFamily="34" charset="-120"/>
+              </a:rPr>
+              <a:t>Many processes share CPU, memory and disk at once.</a:t>
+            </a:r>
+            <a:endParaRPr lang="en-US" sz="1400" dirty="0"/>
+          </a:p>
+        </p:txBody>
+      </p:sp>
+      <p:sp>
+        <p:nvSpPr>
+          <p:cNvPr id="12" name="Shape 9"/>
+          <p:cNvSpPr/>
+          <p:nvPr/>
+        </p:nvSpPr>
+        <p:spPr>
+          <a:xfrm>
+            <a:off x="4297680" y="2606040"/>
+            <a:ext cx="731520" cy="731520"/>
+          </a:xfrm>
+          <a:prstGeom prst="ellipse">
+            <a:avLst/>
+          </a:prstGeom>
+          <a:solidFill>
+            <a:srgbClr val="C1272D"/>
+          </a:solidFill>
+          <a:ln/>
+        </p:spPr>
+      </p:sp>
+      <p:pic>
+        <p:nvPicPr>
+          <p:cNvPr id="13" name="Image 1" descr="preencoded.png"/>
+          <p:cNvPicPr>
+            <a:picLocks noChangeAspect="1"/>
+          </p:cNvPicPr>
+          <p:nvPr/>
+        </p:nvPicPr>
+        <p:blipFill>
+          <a:blip r:embed="rId4"/>
+          <a:stretch>
+            <a:fillRect/>
+          </a:stretch>
+        </p:blipFill>
+        <p:spPr>
+          <a:xfrm>
+            <a:off x="4480560" y="2788920"/>
+            <a:ext cx="365760" cy="365760"/>
+          </a:xfrm>
+          <a:prstGeom prst="rect">
+            <a:avLst/>
+          </a:prstGeom>
+        </p:spPr>
+      </p:pic>
+      <p:sp>
+        <p:nvSpPr>
+          <p:cNvPr id="14" name="Text 10"/>
+          <p:cNvSpPr txBox="1"/>
+          <p:nvPr/>
+        </p:nvSpPr>
+        <p:spPr>
+          <a:xfrm>
+            <a:off x="5257800" y="2560320"/>
+            <a:ext cx="3291840" cy="320040"/>
+          </a:xfrm>
+          <a:prstGeom prst="rect">
+            <a:avLst/>
+          </a:prstGeom>
+          <a:noFill/>
+          <a:ln/>
+        </p:spPr>
+        <p:txBody>
+          <a:bodyPr wrap="square" lIns="0" tIns="0" rIns="0" bIns="0" rtlCol="0" anchor="t"/>
+          <a:lstStyle/>
+          <a:p>
+            <a:pPr marL="0" indent="0">
+              <a:buNone/>
+            </a:pPr>
+            <a:r>
+              <a:rPr lang="en-US" sz="1700" b="1" dirty="0">
+                <a:solidFill>
+                  <a:srgbClr val="3B1D12"/>
+                </a:solidFill>
+                <a:latin typeface="Cambria" pitchFamily="34" charset="0"/>
+                <a:ea typeface="Cambria" pitchFamily="34" charset="-122"/>
+                <a:cs typeface="Cambria" pitchFamily="34" charset="-120"/>
+              </a:rPr>
+              <a:t>Hard for beginners</a:t>
+            </a:r>
+            <a:endParaRPr lang="en-US" sz="1700" dirty="0"/>
+          </a:p>
+        </p:txBody>
+      </p:sp>
+      <p:sp>
+        <p:nvSpPr>
+          <p:cNvPr id="15" name="Text 11"/>
+          <p:cNvSpPr txBox="1"/>
+          <p:nvPr/>
+        </p:nvSpPr>
+        <p:spPr>
+          <a:xfrm>
+            <a:off x="5257800" y="2898648"/>
+            <a:ext cx="3291840" cy="548640"/>
+          </a:xfrm>
+          <a:prstGeom prst="rect">
+            <a:avLst/>
+          </a:prstGeom>
+          <a:noFill/>
+          <a:ln/>
+        </p:spPr>
+        <p:txBody>
+          <a:bodyPr wrap="square" lIns="0" tIns="0" rIns="0" bIns="0" rtlCol="0" anchor="t"/>
+          <a:lstStyle/>
+          <a:p>
+            <a:pPr marL="0" indent="0">
+              <a:buNone/>
+            </a:pPr>
+            <a:r>
+              <a:rPr lang="en-US" sz="1400" dirty="0">
+                <a:solidFill>
+                  <a:srgbClr val="6B4A3A"/>
+                </a:solidFill>
+                <a:latin typeface="Calibri" pitchFamily="34" charset="0"/>
+                <a:ea typeface="Calibri" pitchFamily="34" charset="-122"/>
+                <a:cs typeface="Calibri" pitchFamily="34" charset="-120"/>
+              </a:rPr>
+              <a:t>Beginners struggle to see where resources go.</a:t>
+            </a:r>
+            <a:endParaRPr lang="en-US" sz="1400" dirty="0"/>
+          </a:p>
+        </p:txBody>
+      </p:sp>
+      <p:sp>
+        <p:nvSpPr>
+          <p:cNvPr id="16" name="Shape 12"/>
+          <p:cNvSpPr/>
+          <p:nvPr/>
+        </p:nvSpPr>
+        <p:spPr>
+          <a:xfrm>
+            <a:off x="4297680" y="3657600"/>
+            <a:ext cx="731520" cy="731520"/>
+          </a:xfrm>
+          <a:prstGeom prst="ellipse">
+            <a:avLst/>
+          </a:prstGeom>
+          <a:solidFill>
+            <a:srgbClr val="C1272D"/>
+          </a:solidFill>
+          <a:ln/>
+        </p:spPr>
+      </p:sp>
+      <p:pic>
+        <p:nvPicPr>
+          <p:cNvPr id="17" name="Image 2" descr="preencoded.png"/>
+          <p:cNvPicPr>
+            <a:picLocks noChangeAspect="1"/>
+          </p:cNvPicPr>
+          <p:nvPr/>
+        </p:nvPicPr>
+        <p:blipFill>
+          <a:blip r:embed="rId5"/>
+          <a:stretch>
+            <a:fillRect/>
+          </a:stretch>
+        </p:blipFill>
+        <p:spPr>
+          <a:xfrm>
+            <a:off x="4480560" y="3840480"/>
+            <a:ext cx="365760" cy="365760"/>
+          </a:xfrm>
+          <a:prstGeom prst="rect">
+            <a:avLst/>
+          </a:prstGeom>
+        </p:spPr>
+      </p:pic>
+      <p:sp>
+        <p:nvSpPr>
+          <p:cNvPr id="18" name="Text 13"/>
+          <p:cNvSpPr txBox="1"/>
+          <p:nvPr/>
+        </p:nvSpPr>
+        <p:spPr>
+          <a:xfrm>
+            <a:off x="5257800" y="3611880"/>
+            <a:ext cx="3291840" cy="320040"/>
+          </a:xfrm>
+          <a:prstGeom prst="rect">
+            <a:avLst/>
+          </a:prstGeom>
+          <a:noFill/>
+          <a:ln/>
+        </p:spPr>
+        <p:txBody>
+          <a:bodyPr wrap="square" lIns="0" tIns="0" rIns="0" bIns="0" rtlCol="0" anchor="t"/>
+          <a:lstStyle/>
+          <a:p>
+            <a:pPr marL="0" indent="0">
+              <a:buNone/>
+            </a:pPr>
+            <a:r>
+              <a:rPr lang="en-US" sz="1700" b="1" dirty="0">
+                <a:solidFill>
+                  <a:srgbClr val="3B1D12"/>
+                </a:solidFill>
+                <a:latin typeface="Cambria" pitchFamily="34" charset="0"/>
+                <a:ea typeface="Cambria" pitchFamily="34" charset="-122"/>
+                <a:cs typeface="Cambria" pitchFamily="34" charset="-120"/>
+              </a:rPr>
               <a:t>Scattered commands</a:t>
             </a:r>
             <a:endParaRPr lang="en-US" sz="1700" dirty="0"/>
@@ -4904,7 +4641,7 @@
           <a:bodyPr wrap="square" lIns="0" tIns="0" rIns="0" bIns="0" rtlCol="0" anchor="t"/>
           <a:lstStyle/>
           <a:p>
-            <a:pPr indent="0" marL="0">
+            <a:pPr marL="0" indent="0">
               <a:buNone/>
             </a:pPr>
             <a:r>
@@ -4928,7 +4665,7 @@
     <a:masterClrMapping/>
   </p:clrMapOvr>
   <p:transition spd="med">
-    <p:push dir="l"/>
+    <p:push/>
   </p:transition>
 </p:sld>
 </file>
@@ -4941,6 +4678,7 @@
         <a:solidFill>
           <a:srgbClr val="FFF3DC"/>
         </a:solidFill>
+        <a:effectLst/>
       </p:bgPr>
     </p:bg>
     <p:spTree>
@@ -5038,7 +4776,7 @@
           <a:bodyPr wrap="square" lIns="0" tIns="0" rIns="0" bIns="0" rtlCol="0" anchor="ctr"/>
           <a:lstStyle/>
           <a:p>
-            <a:pPr indent="0" marL="0">
+            <a:pPr marL="0" indent="0">
               <a:buNone/>
             </a:pPr>
             <a:r>
@@ -5077,7 +4815,7 @@
           </a:solidFill>
           <a:ln/>
           <a:effectLst>
-            <a:outerShdw sx="100000" sy="100000" kx="0" ky="0" algn="bl" rotWithShape="0" blurRad="101600" dist="38100" dir="5400000">
+            <a:outerShdw blurRad="101600" dist="38100" dir="5400000" algn="bl" rotWithShape="0">
               <a:srgbClr val="000000">
                 <a:alpha val="20000"/>
               </a:srgbClr>
@@ -5107,309 +4845,7 @@
       </p:sp>
       <p:pic>
         <p:nvPicPr>
-          <p:cNvPr id="8" name="Image 0" descr="preencoded.png">    </p:cNvPr>
-          <p:cNvPicPr>
-            <a:picLocks noChangeAspect="1"/>
-          </p:cNvPicPr>
-          <p:nvPr/>
-        </p:nvPicPr>
-        <p:blipFill>
-          <a:blip r:embed="rId1"/>
-          <a:stretch>
-            <a:fillRect/>
-          </a:stretch>
-        </p:blipFill>
-        <p:spPr>
-          <a:xfrm>
-            <a:off x="937260" y="2007108"/>
-            <a:ext cx="320040" cy="320040"/>
-          </a:xfrm>
-          <a:prstGeom prst="rect">
-            <a:avLst/>
-          </a:prstGeom>
-        </p:spPr>
-      </p:pic>
-      <p:sp>
-        <p:nvSpPr>
-          <p:cNvPr id="9" name="Text 6"/>
-          <p:cNvSpPr txBox="1"/>
-          <p:nvPr/>
-        </p:nvSpPr>
-        <p:spPr>
-          <a:xfrm>
-            <a:off x="1645920" y="1691640"/>
-            <a:ext cx="2651760" cy="320040"/>
-          </a:xfrm>
-          <a:prstGeom prst="rect">
-            <a:avLst/>
-          </a:prstGeom>
-          <a:noFill/>
-          <a:ln/>
-        </p:spPr>
-        <p:txBody>
-          <a:bodyPr wrap="square" lIns="0" tIns="0" rIns="0" bIns="0" rtlCol="0" anchor="t"/>
-          <a:lstStyle/>
-          <a:p>
-            <a:pPr indent="0" marL="0">
-              <a:buNone/>
-            </a:pPr>
-            <a:r>
-              <a:rPr lang="en-US" sz="1800" b="1" dirty="0">
-                <a:solidFill>
-                  <a:srgbClr val="3B1D12"/>
-                </a:solidFill>
-                <a:latin typeface="Cambria" pitchFamily="34" charset="0"/>
-                <a:ea typeface="Cambria" pitchFamily="34" charset="-122"/>
-                <a:cs typeface="Cambria" pitchFamily="34" charset="-120"/>
-              </a:rPr>
-              <a:t>Monitor</a:t>
-            </a:r>
-            <a:endParaRPr lang="en-US" sz="1800" dirty="0"/>
-          </a:p>
-        </p:txBody>
-      </p:sp>
-      <p:sp>
-        <p:nvSpPr>
-          <p:cNvPr id="10" name="Text 7"/>
-          <p:cNvSpPr txBox="1"/>
-          <p:nvPr/>
-        </p:nvSpPr>
-        <p:spPr>
-          <a:xfrm>
-            <a:off x="1645920" y="2057400"/>
-            <a:ext cx="2651760" cy="685800"/>
-          </a:xfrm>
-          <a:prstGeom prst="rect">
-            <a:avLst/>
-          </a:prstGeom>
-          <a:noFill/>
-          <a:ln/>
-        </p:spPr>
-        <p:txBody>
-          <a:bodyPr wrap="square" lIns="0" tIns="0" rIns="0" bIns="0" rtlCol="0" anchor="t"/>
-          <a:lstStyle/>
-          <a:p>
-            <a:pPr indent="0" marL="0">
-              <a:buNone/>
-            </a:pPr>
-            <a:r>
-              <a:rPr lang="en-US" sz="1300" dirty="0">
-                <a:solidFill>
-                  <a:srgbClr val="6B4A3A"/>
-                </a:solidFill>
-                <a:latin typeface="Calibri" pitchFamily="34" charset="0"/>
-                <a:ea typeface="Calibri" pitchFamily="34" charset="-122"/>
-                <a:cs typeface="Calibri" pitchFamily="34" charset="-120"/>
-              </a:rPr>
-              <a:t>Track CPU, memory, disk usage and running processes.</a:t>
-            </a:r>
-            <a:endParaRPr lang="en-US" sz="1300" dirty="0"/>
-          </a:p>
-        </p:txBody>
-      </p:sp>
-      <p:sp>
-        <p:nvSpPr>
-          <p:cNvPr id="11" name="Shape 8"/>
-          <p:cNvSpPr/>
-          <p:nvPr/>
-        </p:nvSpPr>
-        <p:spPr>
-          <a:xfrm>
-            <a:off x="4663440" y="1463040"/>
-            <a:ext cx="3931920" cy="1417320"/>
-          </a:xfrm>
-          <a:prstGeom prst="roundRect">
-            <a:avLst>
-              <a:gd name="adj" fmla="val 7742"/>
-            </a:avLst>
-          </a:prstGeom>
-          <a:solidFill>
-            <a:srgbClr val="FFE2B0"/>
-          </a:solidFill>
-          <a:ln/>
-          <a:effectLst>
-            <a:outerShdw sx="100000" sy="100000" kx="0" ky="0" algn="bl" rotWithShape="0" blurRad="101600" dist="38100" dir="5400000">
-              <a:srgbClr val="000000">
-                <a:alpha val="20000"/>
-              </a:srgbClr>
-            </a:outerShdw>
-          </a:effectLst>
-        </p:spPr>
-      </p:sp>
-      <p:sp>
-        <p:nvSpPr>
-          <p:cNvPr id="12" name="Shape 9"/>
-          <p:cNvSpPr/>
-          <p:nvPr/>
-        </p:nvSpPr>
-        <p:spPr>
-          <a:xfrm>
-            <a:off x="4892040" y="1847088"/>
-            <a:ext cx="640080" cy="640080"/>
-          </a:xfrm>
-          <a:prstGeom prst="ellipse">
-            <a:avLst/>
-          </a:prstGeom>
-          <a:solidFill>
-            <a:srgbClr val="F26B1D"/>
-          </a:solidFill>
-          <a:ln/>
-        </p:spPr>
-      </p:sp>
-      <p:pic>
-        <p:nvPicPr>
-          <p:cNvPr id="13" name="Image 1" descr="preencoded.png">    </p:cNvPr>
-          <p:cNvPicPr>
-            <a:picLocks noChangeAspect="1"/>
-          </p:cNvPicPr>
-          <p:nvPr/>
-        </p:nvPicPr>
-        <p:blipFill>
-          <a:blip r:embed="rId2"/>
-          <a:stretch>
-            <a:fillRect/>
-          </a:stretch>
-        </p:blipFill>
-        <p:spPr>
-          <a:xfrm>
-            <a:off x="5052060" y="2007108"/>
-            <a:ext cx="320040" cy="320040"/>
-          </a:xfrm>
-          <a:prstGeom prst="rect">
-            <a:avLst/>
-          </a:prstGeom>
-        </p:spPr>
-      </p:pic>
-      <p:sp>
-        <p:nvSpPr>
-          <p:cNvPr id="14" name="Text 10"/>
-          <p:cNvSpPr txBox="1"/>
-          <p:nvPr/>
-        </p:nvSpPr>
-        <p:spPr>
-          <a:xfrm>
-            <a:off x="5760720" y="1691640"/>
-            <a:ext cx="2651760" cy="320040"/>
-          </a:xfrm>
-          <a:prstGeom prst="rect">
-            <a:avLst/>
-          </a:prstGeom>
-          <a:noFill/>
-          <a:ln/>
-        </p:spPr>
-        <p:txBody>
-          <a:bodyPr wrap="square" lIns="0" tIns="0" rIns="0" bIns="0" rtlCol="0" anchor="t"/>
-          <a:lstStyle/>
-          <a:p>
-            <a:pPr indent="0" marL="0">
-              <a:buNone/>
-            </a:pPr>
-            <a:r>
-              <a:rPr lang="en-US" sz="1800" b="1" dirty="0">
-                <a:solidFill>
-                  <a:srgbClr val="3B1D12"/>
-                </a:solidFill>
-                <a:latin typeface="Cambria" pitchFamily="34" charset="0"/>
-                <a:ea typeface="Cambria" pitchFamily="34" charset="-122"/>
-                <a:cs typeface="Cambria" pitchFamily="34" charset="-120"/>
-              </a:rPr>
-              <a:t>Collect</a:t>
-            </a:r>
-            <a:endParaRPr lang="en-US" sz="1800" dirty="0"/>
-          </a:p>
-        </p:txBody>
-      </p:sp>
-      <p:sp>
-        <p:nvSpPr>
-          <p:cNvPr id="15" name="Text 11"/>
-          <p:cNvSpPr txBox="1"/>
-          <p:nvPr/>
-        </p:nvSpPr>
-        <p:spPr>
-          <a:xfrm>
-            <a:off x="5760720" y="2057400"/>
-            <a:ext cx="2651760" cy="685800"/>
-          </a:xfrm>
-          <a:prstGeom prst="rect">
-            <a:avLst/>
-          </a:prstGeom>
-          <a:noFill/>
-          <a:ln/>
-        </p:spPr>
-        <p:txBody>
-          <a:bodyPr wrap="square" lIns="0" tIns="0" rIns="0" bIns="0" rtlCol="0" anchor="t"/>
-          <a:lstStyle/>
-          <a:p>
-            <a:pPr indent="0" marL="0">
-              <a:buNone/>
-            </a:pPr>
-            <a:r>
-              <a:rPr lang="en-US" sz="1300" dirty="0">
-                <a:solidFill>
-                  <a:srgbClr val="6B4A3A"/>
-                </a:solidFill>
-                <a:latin typeface="Calibri" pitchFamily="34" charset="0"/>
-                <a:ea typeface="Calibri" pitchFamily="34" charset="-122"/>
-                <a:cs typeface="Calibri" pitchFamily="34" charset="-120"/>
-              </a:rPr>
-              <a:t>Read live data through Linux interfaces such as /proc.</a:t>
-            </a:r>
-            <a:endParaRPr lang="en-US" sz="1300" dirty="0"/>
-          </a:p>
-        </p:txBody>
-      </p:sp>
-      <p:sp>
-        <p:nvSpPr>
-          <p:cNvPr id="16" name="Shape 12"/>
-          <p:cNvSpPr/>
-          <p:nvPr/>
-        </p:nvSpPr>
-        <p:spPr>
-          <a:xfrm>
-            <a:off x="548640" y="3063240"/>
-            <a:ext cx="3931920" cy="1417320"/>
-          </a:xfrm>
-          <a:prstGeom prst="roundRect">
-            <a:avLst>
-              <a:gd name="adj" fmla="val 7742"/>
-            </a:avLst>
-          </a:prstGeom>
-          <a:solidFill>
-            <a:srgbClr val="FFE2B0"/>
-          </a:solidFill>
-          <a:ln/>
-          <a:effectLst>
-            <a:outerShdw sx="100000" sy="100000" kx="0" ky="0" algn="bl" rotWithShape="0" blurRad="101600" dist="38100" dir="5400000">
-              <a:srgbClr val="000000">
-                <a:alpha val="20000"/>
-              </a:srgbClr>
-            </a:outerShdw>
-          </a:effectLst>
-        </p:spPr>
-      </p:sp>
-      <p:sp>
-        <p:nvSpPr>
-          <p:cNvPr id="17" name="Shape 13"/>
-          <p:cNvSpPr/>
-          <p:nvPr/>
-        </p:nvSpPr>
-        <p:spPr>
-          <a:xfrm>
-            <a:off x="777240" y="3447288"/>
-            <a:ext cx="640080" cy="640080"/>
-          </a:xfrm>
-          <a:prstGeom prst="ellipse">
-            <a:avLst/>
-          </a:prstGeom>
-          <a:solidFill>
-            <a:srgbClr val="8E1B1B"/>
-          </a:solidFill>
-          <a:ln/>
-        </p:spPr>
-      </p:sp>
-      <p:pic>
-        <p:nvPicPr>
-          <p:cNvPr id="18" name="Image 2" descr="preencoded.png">    </p:cNvPr>
+          <p:cNvPr id="8" name="Image 0" descr="preencoded.png"/>
           <p:cNvPicPr>
             <a:picLocks noChangeAspect="1"/>
           </p:cNvPicPr>
@@ -5423,7 +4859,7 @@
         </p:blipFill>
         <p:spPr>
           <a:xfrm>
-            <a:off x="937260" y="3607308"/>
+            <a:off x="937260" y="2007108"/>
             <a:ext cx="320040" cy="320040"/>
           </a:xfrm>
           <a:prstGeom prst="rect">
@@ -5433,13 +4869,13 @@
       </p:pic>
       <p:sp>
         <p:nvSpPr>
-          <p:cNvPr id="19" name="Text 14"/>
-          <p:cNvSpPr txBox="1"/>
-          <p:nvPr/>
-        </p:nvSpPr>
-        <p:spPr>
-          <a:xfrm>
-            <a:off x="1645920" y="3291840"/>
+          <p:cNvPr id="9" name="Text 6"/>
+          <p:cNvSpPr txBox="1"/>
+          <p:nvPr/>
+        </p:nvSpPr>
+        <p:spPr>
+          <a:xfrm>
+            <a:off x="1645920" y="1691640"/>
             <a:ext cx="2651760" cy="320040"/>
           </a:xfrm>
           <a:prstGeom prst="rect">
@@ -5452,7 +4888,7 @@
           <a:bodyPr wrap="square" lIns="0" tIns="0" rIns="0" bIns="0" rtlCol="0" anchor="t"/>
           <a:lstStyle/>
           <a:p>
-            <a:pPr indent="0" marL="0">
+            <a:pPr marL="0" indent="0">
               <a:buNone/>
             </a:pPr>
             <a:r>
@@ -5464,7 +4900,7 @@
                 <a:ea typeface="Cambria" pitchFamily="34" charset="-122"/>
                 <a:cs typeface="Cambria" pitchFamily="34" charset="-120"/>
               </a:rPr>
-              <a:t>Apply</a:t>
+              <a:t>Monitor</a:t>
             </a:r>
             <a:endParaRPr lang="en-US" sz="1800" dirty="0"/>
           </a:p>
@@ -5472,13 +4908,13 @@
       </p:sp>
       <p:sp>
         <p:nvSpPr>
-          <p:cNvPr id="20" name="Text 15"/>
-          <p:cNvSpPr txBox="1"/>
-          <p:nvPr/>
-        </p:nvSpPr>
-        <p:spPr>
-          <a:xfrm>
-            <a:off x="1645920" y="3657600"/>
+          <p:cNvPr id="10" name="Text 7"/>
+          <p:cNvSpPr txBox="1"/>
+          <p:nvPr/>
+        </p:nvSpPr>
+        <p:spPr>
+          <a:xfrm>
+            <a:off x="1645920" y="2057400"/>
             <a:ext cx="2651760" cy="685800"/>
           </a:xfrm>
           <a:prstGeom prst="rect">
@@ -5491,7 +4927,7 @@
           <a:bodyPr wrap="square" lIns="0" tIns="0" rIns="0" bIns="0" rtlCol="0" anchor="t"/>
           <a:lstStyle/>
           <a:p>
-            <a:pPr indent="0" marL="0">
+            <a:pPr marL="0" indent="0">
               <a:buNone/>
             </a:pPr>
             <a:r>
@@ -5503,7 +4939,7 @@
                 <a:ea typeface="Calibri" pitchFamily="34" charset="-122"/>
                 <a:cs typeface="Calibri" pitchFamily="34" charset="-120"/>
               </a:rPr>
-              <a:t>Use process, memory, file system and system call concepts.</a:t>
+              <a:t>Track CPU, memory, disk usage and running processes.</a:t>
             </a:r>
             <a:endParaRPr lang="en-US" sz="1300" dirty="0"/>
           </a:p>
@@ -5511,13 +4947,13 @@
       </p:sp>
       <p:sp>
         <p:nvSpPr>
-          <p:cNvPr id="21" name="Shape 16"/>
-          <p:cNvSpPr/>
-          <p:nvPr/>
-        </p:nvSpPr>
-        <p:spPr>
-          <a:xfrm>
-            <a:off x="4663440" y="3063240"/>
+          <p:cNvPr id="11" name="Shape 8"/>
+          <p:cNvSpPr/>
+          <p:nvPr/>
+        </p:nvSpPr>
+        <p:spPr>
+          <a:xfrm>
+            <a:off x="4663440" y="1463040"/>
             <a:ext cx="3931920" cy="1417320"/>
           </a:xfrm>
           <a:prstGeom prst="roundRect">
@@ -5530,7 +4966,7 @@
           </a:solidFill>
           <a:ln/>
           <a:effectLst>
-            <a:outerShdw sx="100000" sy="100000" kx="0" ky="0" algn="bl" rotWithShape="0" blurRad="101600" dist="38100" dir="5400000">
+            <a:outerShdw blurRad="101600" dist="38100" dir="5400000" algn="bl" rotWithShape="0">
               <a:srgbClr val="000000">
                 <a:alpha val="20000"/>
               </a:srgbClr>
@@ -5540,27 +4976,27 @@
       </p:sp>
       <p:sp>
         <p:nvSpPr>
-          <p:cNvPr id="22" name="Shape 17"/>
-          <p:cNvSpPr/>
-          <p:nvPr/>
-        </p:nvSpPr>
-        <p:spPr>
-          <a:xfrm>
-            <a:off x="4892040" y="3447288"/>
+          <p:cNvPr id="12" name="Shape 9"/>
+          <p:cNvSpPr/>
+          <p:nvPr/>
+        </p:nvSpPr>
+        <p:spPr>
+          <a:xfrm>
+            <a:off x="4892040" y="1847088"/>
             <a:ext cx="640080" cy="640080"/>
           </a:xfrm>
           <a:prstGeom prst="ellipse">
             <a:avLst/>
           </a:prstGeom>
           <a:solidFill>
-            <a:srgbClr val="C1272D"/>
+            <a:srgbClr val="F26B1D"/>
           </a:solidFill>
           <a:ln/>
         </p:spPr>
       </p:sp>
       <p:pic>
         <p:nvPicPr>
-          <p:cNvPr id="23" name="Image 3" descr="preencoded.png">    </p:cNvPr>
+          <p:cNvPr id="13" name="Image 1" descr="preencoded.png"/>
           <p:cNvPicPr>
             <a:picLocks noChangeAspect="1"/>
           </p:cNvPicPr>
@@ -5574,7 +5010,7 @@
         </p:blipFill>
         <p:spPr>
           <a:xfrm>
-            <a:off x="5052060" y="3607308"/>
+            <a:off x="5052060" y="2007108"/>
             <a:ext cx="320040" cy="320040"/>
           </a:xfrm>
           <a:prstGeom prst="rect">
@@ -5584,13 +5020,13 @@
       </p:pic>
       <p:sp>
         <p:nvSpPr>
-          <p:cNvPr id="24" name="Text 18"/>
-          <p:cNvSpPr txBox="1"/>
-          <p:nvPr/>
-        </p:nvSpPr>
-        <p:spPr>
-          <a:xfrm>
-            <a:off x="5760720" y="3291840"/>
+          <p:cNvPr id="14" name="Text 10"/>
+          <p:cNvSpPr txBox="1"/>
+          <p:nvPr/>
+        </p:nvSpPr>
+        <p:spPr>
+          <a:xfrm>
+            <a:off x="5760720" y="1691640"/>
             <a:ext cx="2651760" cy="320040"/>
           </a:xfrm>
           <a:prstGeom prst="rect">
@@ -5603,7 +5039,7 @@
           <a:bodyPr wrap="square" lIns="0" tIns="0" rIns="0" bIns="0" rtlCol="0" anchor="t"/>
           <a:lstStyle/>
           <a:p>
-            <a:pPr indent="0" marL="0">
+            <a:pPr marL="0" indent="0">
               <a:buNone/>
             </a:pPr>
             <a:r>
@@ -5615,6 +5051,308 @@
                 <a:ea typeface="Cambria" pitchFamily="34" charset="-122"/>
                 <a:cs typeface="Cambria" pitchFamily="34" charset="-120"/>
               </a:rPr>
+              <a:t>Collect</a:t>
+            </a:r>
+            <a:endParaRPr lang="en-US" sz="1800" dirty="0"/>
+          </a:p>
+        </p:txBody>
+      </p:sp>
+      <p:sp>
+        <p:nvSpPr>
+          <p:cNvPr id="15" name="Text 11"/>
+          <p:cNvSpPr txBox="1"/>
+          <p:nvPr/>
+        </p:nvSpPr>
+        <p:spPr>
+          <a:xfrm>
+            <a:off x="5760720" y="2057400"/>
+            <a:ext cx="2651760" cy="685800"/>
+          </a:xfrm>
+          <a:prstGeom prst="rect">
+            <a:avLst/>
+          </a:prstGeom>
+          <a:noFill/>
+          <a:ln/>
+        </p:spPr>
+        <p:txBody>
+          <a:bodyPr wrap="square" lIns="0" tIns="0" rIns="0" bIns="0" rtlCol="0" anchor="t"/>
+          <a:lstStyle/>
+          <a:p>
+            <a:pPr marL="0" indent="0">
+              <a:buNone/>
+            </a:pPr>
+            <a:r>
+              <a:rPr lang="en-US" sz="1300" dirty="0">
+                <a:solidFill>
+                  <a:srgbClr val="6B4A3A"/>
+                </a:solidFill>
+                <a:latin typeface="Calibri" pitchFamily="34" charset="0"/>
+                <a:ea typeface="Calibri" pitchFamily="34" charset="-122"/>
+                <a:cs typeface="Calibri" pitchFamily="34" charset="-120"/>
+              </a:rPr>
+              <a:t>Read live data through Linux interfaces such as /proc.</a:t>
+            </a:r>
+            <a:endParaRPr lang="en-US" sz="1300" dirty="0"/>
+          </a:p>
+        </p:txBody>
+      </p:sp>
+      <p:sp>
+        <p:nvSpPr>
+          <p:cNvPr id="16" name="Shape 12"/>
+          <p:cNvSpPr/>
+          <p:nvPr/>
+        </p:nvSpPr>
+        <p:spPr>
+          <a:xfrm>
+            <a:off x="548640" y="3063240"/>
+            <a:ext cx="3931920" cy="1417320"/>
+          </a:xfrm>
+          <a:prstGeom prst="roundRect">
+            <a:avLst>
+              <a:gd name="adj" fmla="val 7742"/>
+            </a:avLst>
+          </a:prstGeom>
+          <a:solidFill>
+            <a:srgbClr val="FFE2B0"/>
+          </a:solidFill>
+          <a:ln/>
+          <a:effectLst>
+            <a:outerShdw blurRad="101600" dist="38100" dir="5400000" algn="bl" rotWithShape="0">
+              <a:srgbClr val="000000">
+                <a:alpha val="20000"/>
+              </a:srgbClr>
+            </a:outerShdw>
+          </a:effectLst>
+        </p:spPr>
+      </p:sp>
+      <p:sp>
+        <p:nvSpPr>
+          <p:cNvPr id="17" name="Shape 13"/>
+          <p:cNvSpPr/>
+          <p:nvPr/>
+        </p:nvSpPr>
+        <p:spPr>
+          <a:xfrm>
+            <a:off x="777240" y="3447288"/>
+            <a:ext cx="640080" cy="640080"/>
+          </a:xfrm>
+          <a:prstGeom prst="ellipse">
+            <a:avLst/>
+          </a:prstGeom>
+          <a:solidFill>
+            <a:srgbClr val="8E1B1B"/>
+          </a:solidFill>
+          <a:ln/>
+        </p:spPr>
+      </p:sp>
+      <p:pic>
+        <p:nvPicPr>
+          <p:cNvPr id="18" name="Image 2" descr="preencoded.png"/>
+          <p:cNvPicPr>
+            <a:picLocks noChangeAspect="1"/>
+          </p:cNvPicPr>
+          <p:nvPr/>
+        </p:nvPicPr>
+        <p:blipFill>
+          <a:blip r:embed="rId5"/>
+          <a:stretch>
+            <a:fillRect/>
+          </a:stretch>
+        </p:blipFill>
+        <p:spPr>
+          <a:xfrm>
+            <a:off x="937260" y="3607308"/>
+            <a:ext cx="320040" cy="320040"/>
+          </a:xfrm>
+          <a:prstGeom prst="rect">
+            <a:avLst/>
+          </a:prstGeom>
+        </p:spPr>
+      </p:pic>
+      <p:sp>
+        <p:nvSpPr>
+          <p:cNvPr id="19" name="Text 14"/>
+          <p:cNvSpPr txBox="1"/>
+          <p:nvPr/>
+        </p:nvSpPr>
+        <p:spPr>
+          <a:xfrm>
+            <a:off x="1645920" y="3291840"/>
+            <a:ext cx="2651760" cy="320040"/>
+          </a:xfrm>
+          <a:prstGeom prst="rect">
+            <a:avLst/>
+          </a:prstGeom>
+          <a:noFill/>
+          <a:ln/>
+        </p:spPr>
+        <p:txBody>
+          <a:bodyPr wrap="square" lIns="0" tIns="0" rIns="0" bIns="0" rtlCol="0" anchor="t"/>
+          <a:lstStyle/>
+          <a:p>
+            <a:pPr marL="0" indent="0">
+              <a:buNone/>
+            </a:pPr>
+            <a:r>
+              <a:rPr lang="en-US" sz="1800" b="1" dirty="0">
+                <a:solidFill>
+                  <a:srgbClr val="3B1D12"/>
+                </a:solidFill>
+                <a:latin typeface="Cambria" pitchFamily="34" charset="0"/>
+                <a:ea typeface="Cambria" pitchFamily="34" charset="-122"/>
+                <a:cs typeface="Cambria" pitchFamily="34" charset="-120"/>
+              </a:rPr>
+              <a:t>Apply</a:t>
+            </a:r>
+            <a:endParaRPr lang="en-US" sz="1800" dirty="0"/>
+          </a:p>
+        </p:txBody>
+      </p:sp>
+      <p:sp>
+        <p:nvSpPr>
+          <p:cNvPr id="20" name="Text 15"/>
+          <p:cNvSpPr txBox="1"/>
+          <p:nvPr/>
+        </p:nvSpPr>
+        <p:spPr>
+          <a:xfrm>
+            <a:off x="1645920" y="3657600"/>
+            <a:ext cx="2651760" cy="685800"/>
+          </a:xfrm>
+          <a:prstGeom prst="rect">
+            <a:avLst/>
+          </a:prstGeom>
+          <a:noFill/>
+          <a:ln/>
+        </p:spPr>
+        <p:txBody>
+          <a:bodyPr wrap="square" lIns="0" tIns="0" rIns="0" bIns="0" rtlCol="0" anchor="t"/>
+          <a:lstStyle/>
+          <a:p>
+            <a:pPr marL="0" indent="0">
+              <a:buNone/>
+            </a:pPr>
+            <a:r>
+              <a:rPr lang="en-US" sz="1300" dirty="0">
+                <a:solidFill>
+                  <a:srgbClr val="6B4A3A"/>
+                </a:solidFill>
+                <a:latin typeface="Calibri" pitchFamily="34" charset="0"/>
+                <a:ea typeface="Calibri" pitchFamily="34" charset="-122"/>
+                <a:cs typeface="Calibri" pitchFamily="34" charset="-120"/>
+              </a:rPr>
+              <a:t>Use process, memory, file system and system call concepts.</a:t>
+            </a:r>
+            <a:endParaRPr lang="en-US" sz="1300" dirty="0"/>
+          </a:p>
+        </p:txBody>
+      </p:sp>
+      <p:sp>
+        <p:nvSpPr>
+          <p:cNvPr id="21" name="Shape 16"/>
+          <p:cNvSpPr/>
+          <p:nvPr/>
+        </p:nvSpPr>
+        <p:spPr>
+          <a:xfrm>
+            <a:off x="4663440" y="3063240"/>
+            <a:ext cx="3931920" cy="1417320"/>
+          </a:xfrm>
+          <a:prstGeom prst="roundRect">
+            <a:avLst>
+              <a:gd name="adj" fmla="val 7742"/>
+            </a:avLst>
+          </a:prstGeom>
+          <a:solidFill>
+            <a:srgbClr val="FFE2B0"/>
+          </a:solidFill>
+          <a:ln/>
+          <a:effectLst>
+            <a:outerShdw blurRad="101600" dist="38100" dir="5400000" algn="bl" rotWithShape="0">
+              <a:srgbClr val="000000">
+                <a:alpha val="20000"/>
+              </a:srgbClr>
+            </a:outerShdw>
+          </a:effectLst>
+        </p:spPr>
+      </p:sp>
+      <p:sp>
+        <p:nvSpPr>
+          <p:cNvPr id="22" name="Shape 17"/>
+          <p:cNvSpPr/>
+          <p:nvPr/>
+        </p:nvSpPr>
+        <p:spPr>
+          <a:xfrm>
+            <a:off x="4892040" y="3447288"/>
+            <a:ext cx="640080" cy="640080"/>
+          </a:xfrm>
+          <a:prstGeom prst="ellipse">
+            <a:avLst/>
+          </a:prstGeom>
+          <a:solidFill>
+            <a:srgbClr val="C1272D"/>
+          </a:solidFill>
+          <a:ln/>
+        </p:spPr>
+      </p:sp>
+      <p:pic>
+        <p:nvPicPr>
+          <p:cNvPr id="23" name="Image 3" descr="preencoded.png"/>
+          <p:cNvPicPr>
+            <a:picLocks noChangeAspect="1"/>
+          </p:cNvPicPr>
+          <p:nvPr/>
+        </p:nvPicPr>
+        <p:blipFill>
+          <a:blip r:embed="rId6"/>
+          <a:stretch>
+            <a:fillRect/>
+          </a:stretch>
+        </p:blipFill>
+        <p:spPr>
+          <a:xfrm>
+            <a:off x="5052060" y="3607308"/>
+            <a:ext cx="320040" cy="320040"/>
+          </a:xfrm>
+          <a:prstGeom prst="rect">
+            <a:avLst/>
+          </a:prstGeom>
+        </p:spPr>
+      </p:pic>
+      <p:sp>
+        <p:nvSpPr>
+          <p:cNvPr id="24" name="Text 18"/>
+          <p:cNvSpPr txBox="1"/>
+          <p:nvPr/>
+        </p:nvSpPr>
+        <p:spPr>
+          <a:xfrm>
+            <a:off x="5760720" y="3291840"/>
+            <a:ext cx="2651760" cy="320040"/>
+          </a:xfrm>
+          <a:prstGeom prst="rect">
+            <a:avLst/>
+          </a:prstGeom>
+          <a:noFill/>
+          <a:ln/>
+        </p:spPr>
+        <p:txBody>
+          <a:bodyPr wrap="square" lIns="0" tIns="0" rIns="0" bIns="0" rtlCol="0" anchor="t"/>
+          <a:lstStyle/>
+          <a:p>
+            <a:pPr marL="0" indent="0">
+              <a:buNone/>
+            </a:pPr>
+            <a:r>
+              <a:rPr lang="en-US" sz="1800" b="1" dirty="0">
+                <a:solidFill>
+                  <a:srgbClr val="3B1D12"/>
+                </a:solidFill>
+                <a:latin typeface="Cambria" pitchFamily="34" charset="0"/>
+                <a:ea typeface="Cambria" pitchFamily="34" charset="-122"/>
+                <a:cs typeface="Cambria" pitchFamily="34" charset="-120"/>
+              </a:rPr>
               <a:t>Build</a:t>
             </a:r>
             <a:endParaRPr lang="en-US" sz="1800" dirty="0"/>
@@ -5642,7 +5380,7 @@
           <a:bodyPr wrap="square" lIns="0" tIns="0" rIns="0" bIns="0" rtlCol="0" anchor="t"/>
           <a:lstStyle/>
           <a:p>
-            <a:pPr indent="0" marL="0">
+            <a:pPr marL="0" indent="0">
               <a:buNone/>
             </a:pPr>
             <a:r>
@@ -5679,6 +5417,7 @@
         <a:solidFill>
           <a:srgbClr val="FFF3DC"/>
         </a:solidFill>
+        <a:effectLst/>
       </p:bgPr>
     </p:bg>
     <p:spTree>
@@ -5776,7 +5515,7 @@
           <a:bodyPr wrap="square" lIns="0" tIns="0" rIns="0" bIns="0" rtlCol="0" anchor="ctr"/>
           <a:lstStyle/>
           <a:p>
-            <a:pPr indent="0" marL="0">
+            <a:pPr marL="0" indent="0">
               <a:buNone/>
             </a:pPr>
             <a:r>
@@ -5815,7 +5554,7 @@
           </a:solidFill>
           <a:ln/>
           <a:effectLst>
-            <a:outerShdw sx="100000" sy="100000" kx="0" ky="0" algn="bl" rotWithShape="0" blurRad="101600" dist="38100" dir="5400000">
+            <a:outerShdw blurRad="101600" dist="38100" dir="5400000" algn="bl" rotWithShape="0">
               <a:srgbClr val="000000">
                 <a:alpha val="20000"/>
               </a:srgbClr>
@@ -5844,7 +5583,7 @@
           <a:bodyPr wrap="square" lIns="0" tIns="0" rIns="0" bIns="0" rtlCol="0" anchor="t"/>
           <a:lstStyle/>
           <a:p>
-            <a:pPr indent="0" marL="0">
+            <a:pPr marL="0" indent="0">
               <a:buNone/>
             </a:pPr>
             <a:r>
@@ -5883,7 +5622,7 @@
           <a:bodyPr wrap="square" lIns="0" tIns="0" rIns="0" bIns="0" rtlCol="0" anchor="t"/>
           <a:lstStyle/>
           <a:p>
-            <a:pPr indent="0" marL="0">
+            <a:pPr marL="0" indent="0">
               <a:buNone/>
             </a:pPr>
             <a:r>
@@ -5922,7 +5661,7 @@
           <a:bodyPr wrap="square" lIns="0" tIns="0" rIns="0" bIns="0" rtlCol="0" anchor="t"/>
           <a:lstStyle/>
           <a:p>
-            <a:pPr indent="0" marL="0">
+            <a:pPr marL="0" indent="0">
               <a:buNone/>
             </a:pPr>
             <a:r>
@@ -5981,7 +5720,7 @@
           </a:solidFill>
           <a:ln/>
           <a:effectLst>
-            <a:outerShdw sx="100000" sy="100000" kx="0" ky="0" algn="bl" rotWithShape="0" blurRad="101600" dist="38100" dir="5400000">
+            <a:outerShdw blurRad="101600" dist="38100" dir="5400000" algn="bl" rotWithShape="0">
               <a:srgbClr val="000000">
                 <a:alpha val="20000"/>
               </a:srgbClr>
@@ -6010,7 +5749,7 @@
           <a:bodyPr wrap="square" lIns="0" tIns="0" rIns="0" bIns="0" rtlCol="0" anchor="t"/>
           <a:lstStyle/>
           <a:p>
-            <a:pPr indent="0" marL="0">
+            <a:pPr marL="0" indent="0">
               <a:buNone/>
             </a:pPr>
             <a:r>
@@ -6049,7 +5788,7 @@
           <a:bodyPr wrap="square" lIns="0" tIns="0" rIns="0" bIns="0" rtlCol="0" anchor="t"/>
           <a:lstStyle/>
           <a:p>
-            <a:pPr indent="0" marL="0">
+            <a:pPr marL="0" indent="0">
               <a:buNone/>
             </a:pPr>
             <a:r>
@@ -6088,7 +5827,7 @@
           <a:bodyPr wrap="square" lIns="0" tIns="0" rIns="0" bIns="0" rtlCol="0" anchor="t"/>
           <a:lstStyle/>
           <a:p>
-            <a:pPr indent="0" marL="0">
+            <a:pPr marL="0" indent="0">
               <a:buNone/>
             </a:pPr>
             <a:r>
@@ -6147,7 +5886,7 @@
           </a:solidFill>
           <a:ln/>
           <a:effectLst>
-            <a:outerShdw sx="100000" sy="100000" kx="0" ky="0" algn="bl" rotWithShape="0" blurRad="101600" dist="38100" dir="5400000">
+            <a:outerShdw blurRad="101600" dist="38100" dir="5400000" algn="bl" rotWithShape="0">
               <a:srgbClr val="000000">
                 <a:alpha val="20000"/>
               </a:srgbClr>
@@ -6176,7 +5915,7 @@
           <a:bodyPr wrap="square" lIns="0" tIns="0" rIns="0" bIns="0" rtlCol="0" anchor="t"/>
           <a:lstStyle/>
           <a:p>
-            <a:pPr indent="0" marL="0">
+            <a:pPr marL="0" indent="0">
               <a:buNone/>
             </a:pPr>
             <a:r>
@@ -6215,7 +5954,7 @@
           <a:bodyPr wrap="square" lIns="0" tIns="0" rIns="0" bIns="0" rtlCol="0" anchor="t"/>
           <a:lstStyle/>
           <a:p>
-            <a:pPr indent="0" marL="0">
+            <a:pPr marL="0" indent="0">
               <a:buNone/>
             </a:pPr>
             <a:r>
@@ -6254,7 +5993,7 @@
           <a:bodyPr wrap="square" lIns="0" tIns="0" rIns="0" bIns="0" rtlCol="0" anchor="t"/>
           <a:lstStyle/>
           <a:p>
-            <a:pPr indent="0" marL="0">
+            <a:pPr marL="0" indent="0">
               <a:buNone/>
             </a:pPr>
             <a:r>
@@ -6313,7 +6052,7 @@
           </a:solidFill>
           <a:ln/>
           <a:effectLst>
-            <a:outerShdw sx="100000" sy="100000" kx="0" ky="0" algn="bl" rotWithShape="0" blurRad="101600" dist="38100" dir="5400000">
+            <a:outerShdw blurRad="101600" dist="38100" dir="5400000" algn="bl" rotWithShape="0">
               <a:srgbClr val="000000">
                 <a:alpha val="20000"/>
               </a:srgbClr>
@@ -6342,7 +6081,7 @@
           <a:bodyPr wrap="square" lIns="0" tIns="0" rIns="0" bIns="0" rtlCol="0" anchor="t"/>
           <a:lstStyle/>
           <a:p>
-            <a:pPr indent="0" marL="0">
+            <a:pPr marL="0" indent="0">
               <a:buNone/>
             </a:pPr>
             <a:r>
@@ -6381,7 +6120,7 @@
           <a:bodyPr wrap="square" lIns="0" tIns="0" rIns="0" bIns="0" rtlCol="0" anchor="t"/>
           <a:lstStyle/>
           <a:p>
-            <a:pPr indent="0" marL="0">
+            <a:pPr marL="0" indent="0">
               <a:buNone/>
             </a:pPr>
             <a:r>
@@ -6420,7 +6159,7 @@
           <a:bodyPr wrap="square" lIns="0" tIns="0" rIns="0" bIns="0" rtlCol="0" anchor="t"/>
           <a:lstStyle/>
           <a:p>
-            <a:pPr indent="0" marL="0">
+            <a:pPr marL="0" indent="0">
               <a:buNone/>
             </a:pPr>
             <a:r>
@@ -6459,11 +6198,11 @@
           <a:bodyPr wrap="square" lIns="0" tIns="0" rIns="0" bIns="0" rtlCol="0" anchor="t"/>
           <a:lstStyle/>
           <a:p>
-            <a:pPr indent="0" marL="0">
-              <a:buNone/>
-            </a:pPr>
-            <a:r>
-              <a:rPr lang="en-US" sz="1100" b="1" spc="200" kern="0" dirty="0">
+            <a:pPr marL="0" indent="0">
+              <a:buNone/>
+            </a:pPr>
+            <a:r>
+              <a:rPr lang="en-US" sz="1100" b="1" kern="0" spc="200" dirty="0">
                 <a:solidFill>
                   <a:srgbClr val="C1272D"/>
                 </a:solidFill>
@@ -6520,7 +6259,7 @@
           <a:bodyPr wrap="square" lIns="0" tIns="0" rIns="0" bIns="0" rtlCol="0" anchor="ctr"/>
           <a:lstStyle/>
           <a:p>
-            <a:pPr algn="ctr" indent="0" marL="0">
+            <a:pPr marL="0" indent="0" algn="ctr">
               <a:buNone/>
             </a:pPr>
             <a:r>
@@ -6581,7 +6320,7 @@
           <a:bodyPr wrap="square" lIns="0" tIns="0" rIns="0" bIns="0" rtlCol="0" anchor="ctr"/>
           <a:lstStyle/>
           <a:p>
-            <a:pPr algn="ctr" indent="0" marL="0">
+            <a:pPr marL="0" indent="0" algn="ctr">
               <a:buNone/>
             </a:pPr>
             <a:r>
@@ -6642,7 +6381,7 @@
           <a:bodyPr wrap="square" lIns="0" tIns="0" rIns="0" bIns="0" rtlCol="0" anchor="ctr"/>
           <a:lstStyle/>
           <a:p>
-            <a:pPr algn="ctr" indent="0" marL="0">
+            <a:pPr marL="0" indent="0" algn="ctr">
               <a:buNone/>
             </a:pPr>
             <a:r>
@@ -6703,7 +6442,7 @@
           <a:bodyPr wrap="square" lIns="0" tIns="0" rIns="0" bIns="0" rtlCol="0" anchor="ctr"/>
           <a:lstStyle/>
           <a:p>
-            <a:pPr algn="ctr" indent="0" marL="0">
+            <a:pPr marL="0" indent="0" algn="ctr">
               <a:buNone/>
             </a:pPr>
             <a:r>
@@ -6764,7 +6503,7 @@
           <a:bodyPr wrap="square" lIns="0" tIns="0" rIns="0" bIns="0" rtlCol="0" anchor="ctr"/>
           <a:lstStyle/>
           <a:p>
-            <a:pPr algn="ctr" indent="0" marL="0">
+            <a:pPr marL="0" indent="0" algn="ctr">
               <a:buNone/>
             </a:pPr>
             <a:r>
@@ -6803,7 +6542,7 @@
           <a:bodyPr wrap="square" lIns="0" tIns="0" rIns="0" bIns="0" rtlCol="0" anchor="t"/>
           <a:lstStyle/>
           <a:p>
-            <a:pPr indent="0" marL="0">
+            <a:pPr marL="0" indent="0">
               <a:buNone/>
             </a:pPr>
             <a:r>
@@ -6827,7 +6566,7 @@
     <a:masterClrMapping/>
   </p:clrMapOvr>
   <p:transition spd="med">
-    <p:split orient="horz" dir="out"/>
+    <p:split/>
   </p:transition>
 </p:sld>
 </file>
@@ -6840,6 +6579,7 @@
         <a:solidFill>
           <a:srgbClr val="FFF3DC"/>
         </a:solidFill>
+        <a:effectLst/>
       </p:bgPr>
     </p:bg>
     <p:spTree>
@@ -6937,7 +6677,7 @@
           <a:bodyPr wrap="square" lIns="0" tIns="0" rIns="0" bIns="0" rtlCol="0" anchor="ctr"/>
           <a:lstStyle/>
           <a:p>
-            <a:pPr indent="0" marL="0">
+            <a:pPr marL="0" indent="0">
               <a:buNone/>
             </a:pPr>
             <a:r>
@@ -6998,7 +6738,7 @@
           <a:bodyPr wrap="square" lIns="0" tIns="0" rIns="0" bIns="0" rtlCol="0" anchor="ctr"/>
           <a:lstStyle/>
           <a:p>
-            <a:pPr indent="0" marL="0">
+            <a:pPr marL="0" indent="0">
               <a:buNone/>
             </a:pPr>
             <a:r>
@@ -7059,7 +6799,7 @@
           <a:bodyPr wrap="square" lIns="0" tIns="0" rIns="0" bIns="0" rtlCol="0" anchor="ctr"/>
           <a:lstStyle/>
           <a:p>
-            <a:pPr indent="0" marL="0">
+            <a:pPr marL="0" indent="0">
               <a:buNone/>
             </a:pPr>
             <a:r>
@@ -7120,7 +6860,7 @@
           <a:bodyPr wrap="square" lIns="0" tIns="0" rIns="0" bIns="0" rtlCol="0" anchor="ctr"/>
           <a:lstStyle/>
           <a:p>
-            <a:pPr indent="0" marL="0">
+            <a:pPr marL="0" indent="0">
               <a:buNone/>
             </a:pPr>
             <a:r>
@@ -7181,7 +6921,7 @@
           <a:bodyPr wrap="square" lIns="0" tIns="0" rIns="0" bIns="0" rtlCol="0" anchor="ctr"/>
           <a:lstStyle/>
           <a:p>
-            <a:pPr indent="0" marL="0">
+            <a:pPr marL="0" indent="0">
               <a:buNone/>
             </a:pPr>
             <a:r>
@@ -7242,7 +6982,7 @@
           <a:bodyPr wrap="square" lIns="0" tIns="0" rIns="0" bIns="0" rtlCol="0" anchor="ctr"/>
           <a:lstStyle/>
           <a:p>
-            <a:pPr indent="0" marL="0">
+            <a:pPr marL="0" indent="0">
               <a:buNone/>
             </a:pPr>
             <a:r>
@@ -7303,7 +7043,7 @@
           <a:bodyPr wrap="square" lIns="0" tIns="0" rIns="0" bIns="0" rtlCol="0" anchor="ctr"/>
           <a:lstStyle/>
           <a:p>
-            <a:pPr indent="0" marL="0">
+            <a:pPr marL="0" indent="0">
               <a:buNone/>
             </a:pPr>
             <a:r>
@@ -7364,7 +7104,7 @@
           <a:bodyPr wrap="square" lIns="0" tIns="0" rIns="0" bIns="0" rtlCol="0" anchor="ctr"/>
           <a:lstStyle/>
           <a:p>
-            <a:pPr indent="0" marL="0">
+            <a:pPr marL="0" indent="0">
               <a:buNone/>
             </a:pPr>
             <a:r>
@@ -7425,7 +7165,7 @@
           <a:bodyPr wrap="square" lIns="0" tIns="0" rIns="0" bIns="0" rtlCol="0" anchor="ctr"/>
           <a:lstStyle/>
           <a:p>
-            <a:pPr indent="0" marL="0">
+            <a:pPr marL="0" indent="0">
               <a:buNone/>
             </a:pPr>
             <a:r>
@@ -7486,7 +7226,7 @@
           <a:bodyPr wrap="square" lIns="0" tIns="0" rIns="0" bIns="0" rtlCol="0" anchor="ctr"/>
           <a:lstStyle/>
           <a:p>
-            <a:pPr indent="0" marL="0">
+            <a:pPr marL="0" indent="0">
               <a:buNone/>
             </a:pPr>
             <a:r>
@@ -7547,7 +7287,7 @@
           <a:bodyPr wrap="square" lIns="0" tIns="0" rIns="0" bIns="0" rtlCol="0" anchor="ctr"/>
           <a:lstStyle/>
           <a:p>
-            <a:pPr indent="0" marL="0">
+            <a:pPr marL="0" indent="0">
               <a:buNone/>
             </a:pPr>
             <a:r>
@@ -7571,7 +7311,7 @@
     <a:masterClrMapping/>
   </p:clrMapOvr>
   <p:transition spd="med">
-    <p:cover dir="l"/>
+    <p:cover/>
   </p:transition>
 </p:sld>
 </file>
@@ -7584,6 +7324,7 @@
         <a:solidFill>
           <a:srgbClr val="FFF3DC"/>
         </a:solidFill>
+        <a:effectLst/>
       </p:bgPr>
     </p:bg>
     <p:spTree>
@@ -7681,7 +7422,7 @@
           <a:bodyPr wrap="square" lIns="0" tIns="0" rIns="0" bIns="0" rtlCol="0" anchor="ctr"/>
           <a:lstStyle/>
           <a:p>
-            <a:pPr indent="0" marL="0">
+            <a:pPr marL="0" indent="0">
               <a:buNone/>
             </a:pPr>
             <a:r>
@@ -7720,7 +7461,7 @@
           </a:solidFill>
           <a:ln/>
           <a:effectLst>
-            <a:outerShdw sx="100000" sy="100000" kx="0" ky="0" algn="bl" rotWithShape="0" blurRad="101600" dist="38100" dir="5400000">
+            <a:outerShdw blurRad="101600" dist="38100" dir="5400000" algn="bl" rotWithShape="0">
               <a:srgbClr val="000000">
                 <a:alpha val="20000"/>
               </a:srgbClr>
@@ -7769,7 +7510,7 @@
           <a:bodyPr wrap="square" lIns="0" tIns="0" rIns="0" bIns="0" rtlCol="0" anchor="ctr"/>
           <a:lstStyle/>
           <a:p>
-            <a:pPr algn="ctr" indent="0" marL="0">
+            <a:pPr marL="0" indent="0" algn="ctr">
               <a:buNone/>
             </a:pPr>
             <a:r>
@@ -7808,7 +7549,7 @@
           <a:bodyPr wrap="square" lIns="0" tIns="0" rIns="0" bIns="0" rtlCol="0" anchor="t"/>
           <a:lstStyle/>
           <a:p>
-            <a:pPr indent="0" marL="0">
+            <a:pPr marL="0" indent="0">
               <a:buNone/>
             </a:pPr>
             <a:r>
@@ -7847,7 +7588,7 @@
           <a:bodyPr wrap="square" lIns="0" tIns="0" rIns="0" bIns="0" rtlCol="0" anchor="t"/>
           <a:lstStyle/>
           <a:p>
-            <a:pPr indent="0" marL="0">
+            <a:pPr marL="0" indent="0">
               <a:buNone/>
             </a:pPr>
             <a:r>
@@ -7886,7 +7627,7 @@
           </a:solidFill>
           <a:ln/>
           <a:effectLst>
-            <a:outerShdw sx="100000" sy="100000" kx="0" ky="0" algn="bl" rotWithShape="0" blurRad="101600" dist="38100" dir="5400000">
+            <a:outerShdw blurRad="101600" dist="38100" dir="5400000" algn="bl" rotWithShape="0">
               <a:srgbClr val="000000">
                 <a:alpha val="20000"/>
               </a:srgbClr>
@@ -7935,7 +7676,7 @@
           <a:bodyPr wrap="square" lIns="0" tIns="0" rIns="0" bIns="0" rtlCol="0" anchor="ctr"/>
           <a:lstStyle/>
           <a:p>
-            <a:pPr algn="ctr" indent="0" marL="0">
+            <a:pPr marL="0" indent="0" algn="ctr">
               <a:buNone/>
             </a:pPr>
             <a:r>
@@ -7974,7 +7715,7 @@
           <a:bodyPr wrap="square" lIns="0" tIns="0" rIns="0" bIns="0" rtlCol="0" anchor="t"/>
           <a:lstStyle/>
           <a:p>
-            <a:pPr indent="0" marL="0">
+            <a:pPr marL="0" indent="0">
               <a:buNone/>
             </a:pPr>
             <a:r>
@@ -8013,7 +7754,7 @@
           <a:bodyPr wrap="square" lIns="0" tIns="0" rIns="0" bIns="0" rtlCol="0" anchor="t"/>
           <a:lstStyle/>
           <a:p>
-            <a:pPr indent="0" marL="0">
+            <a:pPr marL="0" indent="0">
               <a:buNone/>
             </a:pPr>
             <a:r>
@@ -8052,7 +7793,7 @@
           </a:solidFill>
           <a:ln/>
           <a:effectLst>
-            <a:outerShdw sx="100000" sy="100000" kx="0" ky="0" algn="bl" rotWithShape="0" blurRad="101600" dist="38100" dir="5400000">
+            <a:outerShdw blurRad="101600" dist="38100" dir="5400000" algn="bl" rotWithShape="0">
               <a:srgbClr val="000000">
                 <a:alpha val="20000"/>
               </a:srgbClr>
@@ -8101,7 +7842,7 @@
           <a:bodyPr wrap="square" lIns="0" tIns="0" rIns="0" bIns="0" rtlCol="0" anchor="ctr"/>
           <a:lstStyle/>
           <a:p>
-            <a:pPr algn="ctr" indent="0" marL="0">
+            <a:pPr marL="0" indent="0" algn="ctr">
               <a:buNone/>
             </a:pPr>
             <a:r>
@@ -8140,7 +7881,7 @@
           <a:bodyPr wrap="square" lIns="0" tIns="0" rIns="0" bIns="0" rtlCol="0" anchor="t"/>
           <a:lstStyle/>
           <a:p>
-            <a:pPr indent="0" marL="0">
+            <a:pPr marL="0" indent="0">
               <a:buNone/>
             </a:pPr>
             <a:r>
@@ -8179,7 +7920,7 @@
           <a:bodyPr wrap="square" lIns="0" tIns="0" rIns="0" bIns="0" rtlCol="0" anchor="t"/>
           <a:lstStyle/>
           <a:p>
-            <a:pPr indent="0" marL="0">
+            <a:pPr marL="0" indent="0">
               <a:buNone/>
             </a:pPr>
             <a:r>
@@ -8218,7 +7959,7 @@
           </a:solidFill>
           <a:ln/>
           <a:effectLst>
-            <a:outerShdw sx="100000" sy="100000" kx="0" ky="0" algn="bl" rotWithShape="0" blurRad="101600" dist="38100" dir="5400000">
+            <a:outerShdw blurRad="101600" dist="38100" dir="5400000" algn="bl" rotWithShape="0">
               <a:srgbClr val="000000">
                 <a:alpha val="20000"/>
               </a:srgbClr>
@@ -8267,7 +8008,7 @@
           <a:bodyPr wrap="square" lIns="0" tIns="0" rIns="0" bIns="0" rtlCol="0" anchor="ctr"/>
           <a:lstStyle/>
           <a:p>
-            <a:pPr algn="ctr" indent="0" marL="0">
+            <a:pPr marL="0" indent="0" algn="ctr">
               <a:buNone/>
             </a:pPr>
             <a:r>
@@ -8306,7 +8047,7 @@
           <a:bodyPr wrap="square" lIns="0" tIns="0" rIns="0" bIns="0" rtlCol="0" anchor="t"/>
           <a:lstStyle/>
           <a:p>
-            <a:pPr indent="0" marL="0">
+            <a:pPr marL="0" indent="0">
               <a:buNone/>
             </a:pPr>
             <a:r>
@@ -8345,7 +8086,7 @@
           <a:bodyPr wrap="square" lIns="0" tIns="0" rIns="0" bIns="0" rtlCol="0" anchor="t"/>
           <a:lstStyle/>
           <a:p>
-            <a:pPr indent="0" marL="0">
+            <a:pPr marL="0" indent="0">
               <a:buNone/>
             </a:pPr>
             <a:r>
@@ -8384,7 +8125,7 @@
           <a:bodyPr wrap="square" lIns="0" tIns="0" rIns="0" bIns="0" rtlCol="0" anchor="t"/>
           <a:lstStyle/>
           <a:p>
-            <a:pPr indent="0" marL="0">
+            <a:pPr marL="0" indent="0">
               <a:buNone/>
             </a:pPr>
             <a:r>
@@ -8421,6 +8162,7 @@
         <a:solidFill>
           <a:srgbClr val="FFF3DC"/>
         </a:solidFill>
+        <a:effectLst/>
       </p:bgPr>
     </p:bg>
     <p:spTree>
@@ -8518,7 +8260,7 @@
           <a:bodyPr wrap="square" lIns="0" tIns="0" rIns="0" bIns="0" rtlCol="0" anchor="ctr"/>
           <a:lstStyle/>
           <a:p>
-            <a:pPr indent="0" marL="0">
+            <a:pPr marL="0" indent="0">
               <a:buNone/>
             </a:pPr>
             <a:r>
@@ -8557,7 +8299,7 @@
           <a:bodyPr wrap="square" lIns="0" tIns="0" rIns="0" bIns="0" rtlCol="0" anchor="t"/>
           <a:lstStyle/>
           <a:p>
-            <a:pPr indent="0" marL="0">
+            <a:pPr marL="0" indent="0">
               <a:buNone/>
             </a:pPr>
             <a:r>
@@ -8596,7 +8338,7 @@
           <a:bodyPr wrap="square" lIns="0" tIns="0" rIns="0" bIns="0" rtlCol="0" anchor="ctr"/>
           <a:lstStyle/>
           <a:p>
-            <a:pPr indent="0" marL="0">
+            <a:pPr marL="0" indent="0">
               <a:buNone/>
             </a:pPr>
             <a:r>
@@ -8635,7 +8377,7 @@
           <a:bodyPr wrap="square" lIns="0" tIns="0" rIns="0" bIns="0" rtlCol="0" anchor="ctr"/>
           <a:lstStyle/>
           <a:p>
-            <a:pPr indent="0" marL="0">
+            <a:pPr marL="0" indent="0">
               <a:buNone/>
             </a:pPr>
             <a:r>
@@ -8679,7 +8421,7 @@
             <a:prstDash val="solid"/>
           </a:ln>
           <a:effectLst>
-            <a:outerShdw sx="100000" sy="100000" kx="0" ky="0" algn="bl" rotWithShape="0" blurRad="101600" dist="38100" dir="5400000">
+            <a:outerShdw blurRad="101600" dist="38100" dir="5400000" algn="bl" rotWithShape="0">
               <a:srgbClr val="000000">
                 <a:alpha val="20000"/>
               </a:srgbClr>
@@ -8768,7 +8510,7 @@
           <a:bodyPr wrap="square" lIns="0" tIns="0" rIns="0" bIns="0" rtlCol="0" anchor="t"/>
           <a:lstStyle/>
           <a:p>
-            <a:pPr algn="ctr" indent="0" marL="0">
+            <a:pPr marL="0" indent="0" algn="ctr">
               <a:buNone/>
             </a:pPr>
             <a:r>
@@ -8788,14 +8530,14 @@
       </p:sp>
       <p:pic>
         <p:nvPicPr>
-          <p:cNvPr id="14" name="Image 0" descr="/mnt/user-data/uploads/1790225481482_image.png">    </p:cNvPr>
+          <p:cNvPr id="14" name="Image 0" descr="/mnt/user-data/uploads/1790225481482_image.png"/>
           <p:cNvPicPr>
             <a:picLocks noChangeAspect="1"/>
           </p:cNvPicPr>
           <p:nvPr/>
         </p:nvPicPr>
         <p:blipFill>
-          <a:blip r:embed="rId1"/>
+          <a:blip r:embed="rId3"/>
           <a:stretch>
             <a:fillRect/>
           </a:stretch>
@@ -8829,6 +8571,7 @@
         <a:solidFill>
           <a:srgbClr val="FFF3DC"/>
         </a:solidFill>
+        <a:effectLst/>
       </p:bgPr>
     </p:bg>
     <p:spTree>
@@ -8931,7 +8674,7 @@
             <a:prstDash val="solid"/>
           </a:ln>
           <a:effectLst>
-            <a:outerShdw sx="100000" sy="100000" kx="0" ky="0" algn="bl" rotWithShape="0" blurRad="101600" dist="38100" dir="5400000">
+            <a:outerShdw blurRad="101600" dist="38100" dir="5400000" algn="bl" rotWithShape="0">
               <a:srgbClr val="000000">
                 <a:alpha val="20000"/>
               </a:srgbClr>
@@ -9020,7 +8763,7 @@
           <a:bodyPr wrap="square" lIns="0" tIns="0" rIns="0" bIns="0" rtlCol="0" anchor="t"/>
           <a:lstStyle/>
           <a:p>
-            <a:pPr algn="ctr" indent="0" marL="0">
+            <a:pPr marL="0" indent="0" algn="ctr">
               <a:buNone/>
             </a:pPr>
             <a:r>
@@ -9040,14 +8783,14 @@
       </p:sp>
       <p:pic>
         <p:nvPicPr>
-          <p:cNvPr id="10" name="Image 0" descr="/mnt/user-data/uploads/1790225491392_image.png">    </p:cNvPr>
+          <p:cNvPr id="10" name="Image 0" descr="/mnt/user-data/uploads/1790225491392_image.png"/>
           <p:cNvPicPr>
             <a:picLocks noChangeAspect="1"/>
           </p:cNvPicPr>
           <p:nvPr/>
         </p:nvPicPr>
         <p:blipFill>
-          <a:blip r:embed="rId1"/>
+          <a:blip r:embed="rId3"/>
           <a:stretch>
             <a:fillRect/>
           </a:stretch>
@@ -9083,7 +8826,7 @@
           <a:bodyPr wrap="square" lIns="0" tIns="0" rIns="0" bIns="0" rtlCol="0" anchor="t"/>
           <a:lstStyle/>
           <a:p>
-            <a:pPr indent="0" marL="0">
+            <a:pPr marL="0" indent="0">
               <a:buNone/>
             </a:pPr>
             <a:r>
@@ -9122,7 +8865,7 @@
           <a:bodyPr wrap="square" lIns="0" tIns="0" rIns="0" bIns="0" rtlCol="0" anchor="t"/>
           <a:lstStyle/>
           <a:p>
-            <a:pPr indent="0" marL="0">
+            <a:pPr marL="0" indent="0">
               <a:buNone/>
             </a:pPr>
             <a:r>
@@ -9183,7 +8926,7 @@
           <a:bodyPr wrap="square" lIns="0" tIns="0" rIns="0" bIns="0" rtlCol="0" anchor="ctr"/>
           <a:lstStyle/>
           <a:p>
-            <a:pPr algn="ctr" indent="0" marL="0">
+            <a:pPr marL="0" indent="0" algn="ctr">
               <a:buNone/>
             </a:pPr>
             <a:r>
@@ -9244,7 +8987,7 @@
           <a:bodyPr wrap="square" lIns="0" tIns="0" rIns="0" bIns="0" rtlCol="0" anchor="ctr"/>
           <a:lstStyle/>
           <a:p>
-            <a:pPr algn="ctr" indent="0" marL="0">
+            <a:pPr marL="0" indent="0" algn="ctr">
               <a:buNone/>
             </a:pPr>
             <a:r>
@@ -9305,7 +9048,7 @@
           <a:bodyPr wrap="square" lIns="0" tIns="0" rIns="0" bIns="0" rtlCol="0" anchor="ctr"/>
           <a:lstStyle/>
           <a:p>
-            <a:pPr algn="ctr" indent="0" marL="0">
+            <a:pPr marL="0" indent="0" algn="ctr">
               <a:buNone/>
             </a:pPr>
             <a:r>
@@ -9329,7 +9072,7 @@
     <a:masterClrMapping/>
   </p:clrMapOvr>
   <p:transition spd="med">
-    <p:push dir="l"/>
+    <p:push/>
   </p:transition>
 </p:sld>
 </file>
@@ -9342,6 +9085,7 @@
         <a:solidFill>
           <a:srgbClr val="FFF3DC"/>
         </a:solidFill>
+        <a:effectLst/>
       </p:bgPr>
     </p:bg>
     <p:spTree>
@@ -9439,7 +9183,7 @@
           <a:bodyPr wrap="square" lIns="0" tIns="0" rIns="0" bIns="0" rtlCol="0" anchor="t"/>
           <a:lstStyle/>
           <a:p>
-            <a:pPr indent="0" marL="0">
+            <a:pPr marL="0" indent="0">
               <a:buNone/>
             </a:pPr>
             <a:r>
@@ -9478,7 +9222,7 @@
           <a:bodyPr wrap="square" lIns="0" tIns="0" rIns="0" bIns="0" rtlCol="0" anchor="t"/>
           <a:lstStyle/>
           <a:p>
-            <a:pPr indent="0" marL="0">
+            <a:pPr marL="0" indent="0">
               <a:buNone/>
             </a:pPr>
             <a:r>
@@ -9517,7 +9261,7 @@
           <a:bodyPr wrap="square" lIns="0" tIns="0" rIns="0" bIns="0" rtlCol="0" anchor="ctr"/>
           <a:lstStyle/>
           <a:p>
-            <a:pPr indent="0" marL="0">
+            <a:pPr marL="0" indent="0">
               <a:buNone/>
             </a:pPr>
             <a:r>
@@ -9556,7 +9300,7 @@
           <a:bodyPr wrap="square" lIns="0" tIns="0" rIns="0" bIns="0" rtlCol="0" anchor="ctr"/>
           <a:lstStyle/>
           <a:p>
-            <a:pPr indent="0" marL="0">
+            <a:pPr marL="0" indent="0">
               <a:buNone/>
             </a:pPr>
             <a:r>
@@ -9600,7 +9344,7 @@
             <a:prstDash val="solid"/>
           </a:ln>
           <a:effectLst>
-            <a:outerShdw sx="100000" sy="100000" kx="0" ky="0" algn="bl" rotWithShape="0" blurRad="101600" dist="38100" dir="5400000">
+            <a:outerShdw blurRad="101600" dist="38100" dir="5400000" algn="bl" rotWithShape="0">
               <a:srgbClr val="000000">
                 <a:alpha val="20000"/>
               </a:srgbClr>
@@ -9689,7 +9433,7 @@
           <a:bodyPr wrap="square" lIns="0" tIns="0" rIns="0" bIns="0" rtlCol="0" anchor="t"/>
           <a:lstStyle/>
           <a:p>
-            <a:pPr algn="ctr" indent="0" marL="0">
+            <a:pPr marL="0" indent="0" algn="ctr">
               <a:buNone/>
             </a:pPr>
             <a:r>
@@ -9709,14 +9453,14 @@
       </p:sp>
       <p:pic>
         <p:nvPicPr>
-          <p:cNvPr id="14" name="Image 0" descr="/mnt/user-data/uploads/1790225537947_image.png">    </p:cNvPr>
+          <p:cNvPr id="14" name="Image 0" descr="/mnt/user-data/uploads/1790225537947_image.png"/>
           <p:cNvPicPr>
             <a:picLocks noChangeAspect="1"/>
           </p:cNvPicPr>
           <p:nvPr/>
         </p:nvPicPr>
         <p:blipFill>
-          <a:blip r:embed="rId1"/>
+          <a:blip r:embed="rId3"/>
           <a:stretch>
             <a:fillRect/>
           </a:stretch>
@@ -10035,4 +9779,319 @@
     </a:ext>
   </a:extLst>
 </a:theme>
+</file>
+
+<file path=ppt/theme/theme2.xml><?xml version="1.0" encoding="utf-8"?>
+<a:theme xmlns:a="http://schemas.openxmlformats.org/drawingml/2006/main" name="Office Theme">
+  <a:themeElements>
+    <a:clrScheme name="Office">
+      <a:dk1>
+        <a:sysClr val="windowText" lastClr="000000"/>
+      </a:dk1>
+      <a:lt1>
+        <a:sysClr val="window" lastClr="FFFFFF"/>
+      </a:lt1>
+      <a:dk2>
+        <a:srgbClr val="0E2841"/>
+      </a:dk2>
+      <a:lt2>
+        <a:srgbClr val="E8E8E8"/>
+      </a:lt2>
+      <a:accent1>
+        <a:srgbClr val="156082"/>
+      </a:accent1>
+      <a:accent2>
+        <a:srgbClr val="E97132"/>
+      </a:accent2>
+      <a:accent3>
+        <a:srgbClr val="196B24"/>
+      </a:accent3>
+      <a:accent4>
+        <a:srgbClr val="0F9ED5"/>
+      </a:accent4>
+      <a:accent5>
+        <a:srgbClr val="A02B93"/>
+      </a:accent5>
+      <a:accent6>
+        <a:srgbClr val="4EA72E"/>
+      </a:accent6>
+      <a:hlink>
+        <a:srgbClr val="467886"/>
+      </a:hlink>
+      <a:folHlink>
+        <a:srgbClr val="96607D"/>
+      </a:folHlink>
+    </a:clrScheme>
+    <a:fontScheme name="Office">
+      <a:majorFont>
+        <a:latin typeface="Aptos Display" panose="02110004020202020204"/>
+        <a:ea typeface=""/>
+        <a:cs typeface=""/>
+        <a:font script="Jpan" typeface="游ゴシック Light"/>
+        <a:font script="Hang" typeface="맑은 고딕"/>
+        <a:font script="Hans" typeface="等线 Light"/>
+        <a:font script="Hant" typeface="新細明體"/>
+        <a:font script="Arab" typeface="Times New Roman"/>
+        <a:font script="Hebr" typeface="Times New Roman"/>
+        <a:font script="Thai" typeface="Angsana New"/>
+        <a:font script="Ethi" typeface="Nyala"/>
+        <a:font script="Beng" typeface="Vrinda"/>
+        <a:font script="Gujr" typeface="Shruti"/>
+        <a:font script="Khmr" typeface="MoolBoran"/>
+        <a:font script="Knda" typeface="Tunga"/>
+        <a:font script="Guru" typeface="Raavi"/>
+        <a:font script="Cans" typeface="Euphemia"/>
+        <a:font script="Cher" typeface="Plantagenet Cherokee"/>
+        <a:font script="Yiii" typeface="Microsoft Yi Baiti"/>
+        <a:font script="Tibt" typeface="Microsoft Himalaya"/>
+        <a:font script="Thaa" typeface="MV Boli"/>
+        <a:font script="Deva" typeface="Mangal"/>
+        <a:font script="Telu" typeface="Gautami"/>
+        <a:font script="Taml" typeface="Latha"/>
+        <a:font script="Syrc" typeface="Estrangelo Edessa"/>
+        <a:font script="Orya" typeface="Kalinga"/>
+        <a:font script="Mlym" typeface="Kartika"/>
+        <a:font script="Laoo" typeface="DokChampa"/>
+        <a:font script="Sinh" typeface="Iskoola Pota"/>
+        <a:font script="Mong" typeface="Mongolian Baiti"/>
+        <a:font script="Viet" typeface="Times New Roman"/>
+        <a:font script="Uigh" typeface="Microsoft Uighur"/>
+        <a:font script="Geor" typeface="Sylfaen"/>
+        <a:font script="Armn" typeface="Arial"/>
+        <a:font script="Bugi" typeface="Leelawadee UI"/>
+        <a:font script="Bopo" typeface="Microsoft JhengHei"/>
+        <a:font script="Java" typeface="Javanese Text"/>
+        <a:font script="Lisu" typeface="Segoe UI"/>
+        <a:font script="Mymr" typeface="Myanmar Text"/>
+        <a:font script="Nkoo" typeface="Ebrima"/>
+        <a:font script="Olck" typeface="Nirmala UI"/>
+        <a:font script="Osma" typeface="Ebrima"/>
+        <a:font script="Phag" typeface="Phagspa"/>
+        <a:font script="Syrn" typeface="Estrangelo Edessa"/>
+        <a:font script="Syrj" typeface="Estrangelo Edessa"/>
+        <a:font script="Syre" typeface="Estrangelo Edessa"/>
+        <a:font script="Sora" typeface="Nirmala UI"/>
+        <a:font script="Tale" typeface="Microsoft Tai Le"/>
+        <a:font script="Talu" typeface="Microsoft New Tai Lue"/>
+        <a:font script="Tfng" typeface="Ebrima"/>
+      </a:majorFont>
+      <a:minorFont>
+        <a:latin typeface="Aptos" panose="02110004020202020204"/>
+        <a:ea typeface=""/>
+        <a:cs typeface=""/>
+        <a:font script="Jpan" typeface="游ゴシック"/>
+        <a:font script="Hang" typeface="맑은 고딕"/>
+        <a:font script="Hans" typeface="等线"/>
+        <a:font script="Hant" typeface="新細明體"/>
+        <a:font script="Arab" typeface="Arial"/>
+        <a:font script="Hebr" typeface="Arial"/>
+        <a:font script="Thai" typeface="Cordia New"/>
+        <a:font script="Ethi" typeface="Nyala"/>
+        <a:font script="Beng" typeface="Vrinda"/>
+        <a:font script="Gujr" typeface="Shruti"/>
+        <a:font script="Khmr" typeface="DaunPenh"/>
+        <a:font script="Knda" typeface="Tunga"/>
+        <a:font script="Guru" typeface="Raavi"/>
+        <a:font script="Cans" typeface="Euphemia"/>
+        <a:font script="Cher" typeface="Plantagenet Cherokee"/>
+        <a:font script="Yiii" typeface="Microsoft Yi Baiti"/>
+        <a:font script="Tibt" typeface="Microsoft Himalaya"/>
+        <a:font script="Thaa" typeface="MV Boli"/>
+        <a:font script="Deva" typeface="Mangal"/>
+        <a:font script="Telu" typeface="Gautami"/>
+        <a:font script="Taml" typeface="Latha"/>
+        <a:font script="Syrc" typeface="Estrangelo Edessa"/>
+        <a:font script="Orya" typeface="Kalinga"/>
+        <a:font script="Mlym" typeface="Kartika"/>
+        <a:font script="Laoo" typeface="DokChampa"/>
+        <a:font script="Sinh" typeface="Iskoola Pota"/>
+        <a:font script="Mong" typeface="Mongolian Baiti"/>
+        <a:font script="Viet" typeface="Arial"/>
+        <a:font script="Uigh" typeface="Microsoft Uighur"/>
+        <a:font script="Geor" typeface="Sylfaen"/>
+        <a:font script="Armn" typeface="Arial"/>
+        <a:font script="Bugi" typeface="Leelawadee UI"/>
+        <a:font script="Bopo" typeface="Microsoft JhengHei"/>
+        <a:font script="Java" typeface="Javanese Text"/>
+        <a:font script="Lisu" typeface="Segoe UI"/>
+        <a:font script="Mymr" typeface="Myanmar Text"/>
+        <a:font script="Nkoo" typeface="Ebrima"/>
+        <a:font script="Olck" typeface="Nirmala UI"/>
+        <a:font script="Osma" typeface="Ebrima"/>
+        <a:font script="Phag" typeface="Phagspa"/>
+        <a:font script="Syrn" typeface="Estrangelo Edessa"/>
+        <a:font script="Syrj" typeface="Estrangelo Edessa"/>
+        <a:font script="Syre" typeface="Estrangelo Edessa"/>
+        <a:font script="Sora" typeface="Nirmala UI"/>
+        <a:font script="Tale" typeface="Microsoft Tai Le"/>
+        <a:font script="Talu" typeface="Microsoft New Tai Lue"/>
+        <a:font script="Tfng" typeface="Ebrima"/>
+      </a:minorFont>
+    </a:fontScheme>
+    <a:fmtScheme name="Office">
+      <a:fillStyleLst>
+        <a:solidFill>
+          <a:schemeClr val="phClr"/>
+        </a:solidFill>
+        <a:gradFill rotWithShape="1">
+          <a:gsLst>
+            <a:gs pos="0">
+              <a:schemeClr val="phClr">
+                <a:lumMod val="110000"/>
+                <a:satMod val="105000"/>
+                <a:tint val="67000"/>
+              </a:schemeClr>
+            </a:gs>
+            <a:gs pos="50000">
+              <a:schemeClr val="phClr">
+                <a:lumMod val="105000"/>
+                <a:satMod val="103000"/>
+                <a:tint val="73000"/>
+              </a:schemeClr>
+            </a:gs>
+            <a:gs pos="100000">
+              <a:schemeClr val="phClr">
+                <a:lumMod val="105000"/>
+                <a:satMod val="109000"/>
+                <a:tint val="81000"/>
+              </a:schemeClr>
+            </a:gs>
+          </a:gsLst>
+          <a:lin ang="5400000" scaled="0"/>
+        </a:gradFill>
+        <a:gradFill rotWithShape="1">
+          <a:gsLst>
+            <a:gs pos="0">
+              <a:schemeClr val="phClr">
+                <a:satMod val="103000"/>
+                <a:lumMod val="102000"/>
+                <a:tint val="94000"/>
+              </a:schemeClr>
+            </a:gs>
+            <a:gs pos="50000">
+              <a:schemeClr val="phClr">
+                <a:satMod val="110000"/>
+                <a:lumMod val="100000"/>
+                <a:shade val="100000"/>
+              </a:schemeClr>
+            </a:gs>
+            <a:gs pos="100000">
+              <a:schemeClr val="phClr">
+                <a:lumMod val="99000"/>
+                <a:satMod val="120000"/>
+                <a:shade val="78000"/>
+              </a:schemeClr>
+            </a:gs>
+          </a:gsLst>
+          <a:lin ang="5400000" scaled="0"/>
+        </a:gradFill>
+      </a:fillStyleLst>
+      <a:lnStyleLst>
+        <a:ln w="12700" cap="flat" cmpd="sng" algn="ctr">
+          <a:solidFill>
+            <a:schemeClr val="phClr"/>
+          </a:solidFill>
+          <a:prstDash val="solid"/>
+          <a:miter lim="800000"/>
+        </a:ln>
+        <a:ln w="19050" cap="flat" cmpd="sng" algn="ctr">
+          <a:solidFill>
+            <a:schemeClr val="phClr"/>
+          </a:solidFill>
+          <a:prstDash val="solid"/>
+          <a:miter lim="800000"/>
+        </a:ln>
+        <a:ln w="25400" cap="flat" cmpd="sng" algn="ctr">
+          <a:solidFill>
+            <a:schemeClr val="phClr"/>
+          </a:solidFill>
+          <a:prstDash val="solid"/>
+          <a:miter lim="800000"/>
+        </a:ln>
+      </a:lnStyleLst>
+      <a:effectStyleLst>
+        <a:effectStyle>
+          <a:effectLst/>
+        </a:effectStyle>
+        <a:effectStyle>
+          <a:effectLst/>
+        </a:effectStyle>
+        <a:effectStyle>
+          <a:effectLst>
+            <a:outerShdw blurRad="57150" dist="19050" dir="5400000" algn="ctr" rotWithShape="0">
+              <a:srgbClr val="000000">
+                <a:alpha val="63000"/>
+              </a:srgbClr>
+            </a:outerShdw>
+          </a:effectLst>
+        </a:effectStyle>
+      </a:effectStyleLst>
+      <a:bgFillStyleLst>
+        <a:solidFill>
+          <a:schemeClr val="phClr"/>
+        </a:solidFill>
+        <a:solidFill>
+          <a:schemeClr val="phClr">
+            <a:tint val="95000"/>
+            <a:satMod val="170000"/>
+          </a:schemeClr>
+        </a:solidFill>
+        <a:gradFill rotWithShape="1">
+          <a:gsLst>
+            <a:gs pos="0">
+              <a:schemeClr val="phClr">
+                <a:tint val="93000"/>
+                <a:satMod val="150000"/>
+                <a:shade val="98000"/>
+                <a:lumMod val="102000"/>
+              </a:schemeClr>
+            </a:gs>
+            <a:gs pos="50000">
+              <a:schemeClr val="phClr">
+                <a:tint val="98000"/>
+                <a:satMod val="130000"/>
+                <a:shade val="90000"/>
+                <a:lumMod val="103000"/>
+              </a:schemeClr>
+            </a:gs>
+            <a:gs pos="100000">
+              <a:schemeClr val="phClr">
+                <a:shade val="63000"/>
+                <a:satMod val="120000"/>
+              </a:schemeClr>
+            </a:gs>
+          </a:gsLst>
+          <a:lin ang="5400000" scaled="0"/>
+        </a:gradFill>
+      </a:bgFillStyleLst>
+    </a:fmtScheme>
+  </a:themeElements>
+  <a:objectDefaults>
+    <a:lnDef>
+      <a:spPr/>
+      <a:bodyPr/>
+      <a:lstStyle/>
+      <a:style>
+        <a:lnRef idx="2">
+          <a:schemeClr val="accent1"/>
+        </a:lnRef>
+        <a:fillRef idx="0">
+          <a:schemeClr val="accent1"/>
+        </a:fillRef>
+        <a:effectRef idx="1">
+          <a:schemeClr val="accent1"/>
+        </a:effectRef>
+        <a:fontRef idx="minor">
+          <a:schemeClr val="tx1"/>
+        </a:fontRef>
+      </a:style>
+    </a:lnDef>
+  </a:objectDefaults>
+  <a:extraClrSchemeLst/>
+  <a:extLst>
+    <a:ext uri="{05A4C25C-085E-4340-85A3-A5531E510DB2}">
+      <thm15:themeFamily xmlns:thm15="http://schemas.microsoft.com/office/thememl/2012/main" name="Office Theme" id="{2E142A2C-CD16-42D6-873A-C26D2A0506FA}" vid="{1BDDFF52-6CD6-40A5-AB3C-68EB2F1E4D0A}"/>
+    </a:ext>
+  </a:extLst>
+</a:theme>
 </file>